--- a/Diploma/Курсова.pptx
+++ b/Diploma/Курсова.pptx
@@ -228,7 +228,7 @@
           <a:p>
             <a:fld id="{DAAA21AF-C656-4534-BD46-42A6B3F92BCB}" type="datetimeFigureOut">
               <a:rPr lang="uk-UA" smtClean="0"/>
-              <a:t>29.05.2025</a:t>
+              <a:t>25.05.26</a:t>
             </a:fld>
             <a:endParaRPr lang="uk-UA"/>
           </a:p>
@@ -386,7 +386,7 @@
           <a:p>
             <a:fld id="{64202CA2-D166-49CC-B4C3-AC4D709240D4}" type="slidenum">
               <a:rPr lang="uk-UA" smtClean="0"/>
-              <a:t>‹№›</a:t>
+              <a:t>‹#›</a:t>
             </a:fld>
             <a:endParaRPr lang="uk-UA"/>
           </a:p>
@@ -726,7 +726,7 @@
           <a:p>
             <a:fld id="{68FCF329-D677-49B6-A1A8-3B2C2FC7781A}" type="datetimeFigureOut">
               <a:rPr lang="uk-UA" smtClean="0"/>
-              <a:t>29.05.2025</a:t>
+              <a:t>25.05.26</a:t>
             </a:fld>
             <a:endParaRPr lang="uk-UA"/>
           </a:p>
@@ -780,7 +780,7 @@
           <a:p>
             <a:fld id="{4E7BB42A-2F35-4D17-9702-336F4545CB24}" type="slidenum">
               <a:rPr lang="uk-UA" smtClean="0"/>
-              <a:t>‹№›</a:t>
+              <a:t>‹#›</a:t>
             </a:fld>
             <a:endParaRPr lang="uk-UA"/>
           </a:p>
@@ -924,7 +924,7 @@
           <a:p>
             <a:fld id="{68FCF329-D677-49B6-A1A8-3B2C2FC7781A}" type="datetimeFigureOut">
               <a:rPr lang="uk-UA" smtClean="0"/>
-              <a:t>29.05.2025</a:t>
+              <a:t>25.05.26</a:t>
             </a:fld>
             <a:endParaRPr lang="uk-UA"/>
           </a:p>
@@ -978,7 +978,7 @@
           <a:p>
             <a:fld id="{4E7BB42A-2F35-4D17-9702-336F4545CB24}" type="slidenum">
               <a:rPr lang="uk-UA" smtClean="0"/>
-              <a:t>‹№›</a:t>
+              <a:t>‹#›</a:t>
             </a:fld>
             <a:endParaRPr lang="uk-UA"/>
           </a:p>
@@ -1132,7 +1132,7 @@
           <a:p>
             <a:fld id="{68FCF329-D677-49B6-A1A8-3B2C2FC7781A}" type="datetimeFigureOut">
               <a:rPr lang="uk-UA" smtClean="0"/>
-              <a:t>29.05.2025</a:t>
+              <a:t>25.05.26</a:t>
             </a:fld>
             <a:endParaRPr lang="uk-UA"/>
           </a:p>
@@ -1186,7 +1186,7 @@
           <a:p>
             <a:fld id="{4E7BB42A-2F35-4D17-9702-336F4545CB24}" type="slidenum">
               <a:rPr lang="uk-UA" smtClean="0"/>
-              <a:t>‹№›</a:t>
+              <a:t>‹#›</a:t>
             </a:fld>
             <a:endParaRPr lang="uk-UA"/>
           </a:p>
@@ -1330,7 +1330,7 @@
           <a:p>
             <a:fld id="{68FCF329-D677-49B6-A1A8-3B2C2FC7781A}" type="datetimeFigureOut">
               <a:rPr lang="uk-UA" smtClean="0"/>
-              <a:t>29.05.2025</a:t>
+              <a:t>25.05.26</a:t>
             </a:fld>
             <a:endParaRPr lang="uk-UA"/>
           </a:p>
@@ -1384,7 +1384,7 @@
           <a:p>
             <a:fld id="{4E7BB42A-2F35-4D17-9702-336F4545CB24}" type="slidenum">
               <a:rPr lang="uk-UA" smtClean="0"/>
-              <a:t>‹№›</a:t>
+              <a:t>‹#›</a:t>
             </a:fld>
             <a:endParaRPr lang="uk-UA"/>
           </a:p>
@@ -1605,7 +1605,7 @@
           <a:p>
             <a:fld id="{68FCF329-D677-49B6-A1A8-3B2C2FC7781A}" type="datetimeFigureOut">
               <a:rPr lang="uk-UA" smtClean="0"/>
-              <a:t>29.05.2025</a:t>
+              <a:t>25.05.26</a:t>
             </a:fld>
             <a:endParaRPr lang="uk-UA"/>
           </a:p>
@@ -1659,7 +1659,7 @@
           <a:p>
             <a:fld id="{4E7BB42A-2F35-4D17-9702-336F4545CB24}" type="slidenum">
               <a:rPr lang="uk-UA" smtClean="0"/>
-              <a:t>‹№›</a:t>
+              <a:t>‹#›</a:t>
             </a:fld>
             <a:endParaRPr lang="uk-UA"/>
           </a:p>
@@ -1870,7 +1870,7 @@
           <a:p>
             <a:fld id="{68FCF329-D677-49B6-A1A8-3B2C2FC7781A}" type="datetimeFigureOut">
               <a:rPr lang="uk-UA" smtClean="0"/>
-              <a:t>29.05.2025</a:t>
+              <a:t>25.05.26</a:t>
             </a:fld>
             <a:endParaRPr lang="uk-UA"/>
           </a:p>
@@ -1924,7 +1924,7 @@
           <a:p>
             <a:fld id="{4E7BB42A-2F35-4D17-9702-336F4545CB24}" type="slidenum">
               <a:rPr lang="uk-UA" smtClean="0"/>
-              <a:t>‹№›</a:t>
+              <a:t>‹#›</a:t>
             </a:fld>
             <a:endParaRPr lang="uk-UA"/>
           </a:p>
@@ -2282,7 +2282,7 @@
           <a:p>
             <a:fld id="{68FCF329-D677-49B6-A1A8-3B2C2FC7781A}" type="datetimeFigureOut">
               <a:rPr lang="uk-UA" smtClean="0"/>
-              <a:t>29.05.2025</a:t>
+              <a:t>25.05.26</a:t>
             </a:fld>
             <a:endParaRPr lang="uk-UA"/>
           </a:p>
@@ -2336,7 +2336,7 @@
           <a:p>
             <a:fld id="{4E7BB42A-2F35-4D17-9702-336F4545CB24}" type="slidenum">
               <a:rPr lang="uk-UA" smtClean="0"/>
-              <a:t>‹№›</a:t>
+              <a:t>‹#›</a:t>
             </a:fld>
             <a:endParaRPr lang="uk-UA"/>
           </a:p>
@@ -2423,7 +2423,7 @@
           <a:p>
             <a:fld id="{68FCF329-D677-49B6-A1A8-3B2C2FC7781A}" type="datetimeFigureOut">
               <a:rPr lang="uk-UA" smtClean="0"/>
-              <a:t>29.05.2025</a:t>
+              <a:t>25.05.26</a:t>
             </a:fld>
             <a:endParaRPr lang="uk-UA"/>
           </a:p>
@@ -2477,7 +2477,7 @@
           <a:p>
             <a:fld id="{4E7BB42A-2F35-4D17-9702-336F4545CB24}" type="slidenum">
               <a:rPr lang="uk-UA" smtClean="0"/>
-              <a:t>‹№›</a:t>
+              <a:t>‹#›</a:t>
             </a:fld>
             <a:endParaRPr lang="uk-UA"/>
           </a:p>
@@ -2536,7 +2536,7 @@
           <a:p>
             <a:fld id="{68FCF329-D677-49B6-A1A8-3B2C2FC7781A}" type="datetimeFigureOut">
               <a:rPr lang="uk-UA" smtClean="0"/>
-              <a:t>29.05.2025</a:t>
+              <a:t>25.05.26</a:t>
             </a:fld>
             <a:endParaRPr lang="uk-UA"/>
           </a:p>
@@ -2590,7 +2590,7 @@
           <a:p>
             <a:fld id="{4E7BB42A-2F35-4D17-9702-336F4545CB24}" type="slidenum">
               <a:rPr lang="uk-UA" smtClean="0"/>
-              <a:t>‹№›</a:t>
+              <a:t>‹#›</a:t>
             </a:fld>
             <a:endParaRPr lang="uk-UA"/>
           </a:p>
@@ -2847,7 +2847,7 @@
           <a:p>
             <a:fld id="{68FCF329-D677-49B6-A1A8-3B2C2FC7781A}" type="datetimeFigureOut">
               <a:rPr lang="uk-UA" smtClean="0"/>
-              <a:t>29.05.2025</a:t>
+              <a:t>25.05.26</a:t>
             </a:fld>
             <a:endParaRPr lang="uk-UA"/>
           </a:p>
@@ -2901,7 +2901,7 @@
           <a:p>
             <a:fld id="{4E7BB42A-2F35-4D17-9702-336F4545CB24}" type="slidenum">
               <a:rPr lang="uk-UA" smtClean="0"/>
-              <a:t>‹№›</a:t>
+              <a:t>‹#›</a:t>
             </a:fld>
             <a:endParaRPr lang="uk-UA"/>
           </a:p>
@@ -3135,7 +3135,7 @@
           <a:p>
             <a:fld id="{68FCF329-D677-49B6-A1A8-3B2C2FC7781A}" type="datetimeFigureOut">
               <a:rPr lang="uk-UA" smtClean="0"/>
-              <a:t>29.05.2025</a:t>
+              <a:t>25.05.26</a:t>
             </a:fld>
             <a:endParaRPr lang="uk-UA"/>
           </a:p>
@@ -3189,7 +3189,7 @@
           <a:p>
             <a:fld id="{4E7BB42A-2F35-4D17-9702-336F4545CB24}" type="slidenum">
               <a:rPr lang="uk-UA" smtClean="0"/>
-              <a:t>‹№›</a:t>
+              <a:t>‹#›</a:t>
             </a:fld>
             <a:endParaRPr lang="uk-UA"/>
           </a:p>
@@ -3376,7 +3376,7 @@
           <a:p>
             <a:fld id="{68FCF329-D677-49B6-A1A8-3B2C2FC7781A}" type="datetimeFigureOut">
               <a:rPr lang="uk-UA" smtClean="0"/>
-              <a:t>29.05.2025</a:t>
+              <a:t>25.05.26</a:t>
             </a:fld>
             <a:endParaRPr lang="uk-UA"/>
           </a:p>
@@ -3466,7 +3466,7 @@
           <a:p>
             <a:fld id="{4E7BB42A-2F35-4D17-9702-336F4545CB24}" type="slidenum">
               <a:rPr lang="uk-UA" smtClean="0"/>
-              <a:t>‹№›</a:t>
+              <a:t>‹#›</a:t>
             </a:fld>
             <a:endParaRPr lang="uk-UA"/>
           </a:p>
@@ -4437,68 +4437,68 @@
           <a:custGeom>
             <a:avLst/>
             <a:gdLst>
-              <a:gd name="connsiteX0" fmla="*/ 0 w 3255095"/>
-              <a:gd name="connsiteY0" fmla="*/ 0 h 18288"/>
-              <a:gd name="connsiteX1" fmla="*/ 618468 w 3255095"/>
-              <a:gd name="connsiteY1" fmla="*/ 0 h 18288"/>
-              <a:gd name="connsiteX2" fmla="*/ 1269487 w 3255095"/>
-              <a:gd name="connsiteY2" fmla="*/ 0 h 18288"/>
-              <a:gd name="connsiteX3" fmla="*/ 1953057 w 3255095"/>
-              <a:gd name="connsiteY3" fmla="*/ 0 h 18288"/>
-              <a:gd name="connsiteX4" fmla="*/ 2636627 w 3255095"/>
-              <a:gd name="connsiteY4" fmla="*/ 0 h 18288"/>
-              <a:gd name="connsiteX5" fmla="*/ 3255095 w 3255095"/>
-              <a:gd name="connsiteY5" fmla="*/ 0 h 18288"/>
-              <a:gd name="connsiteX6" fmla="*/ 3255095 w 3255095"/>
-              <a:gd name="connsiteY6" fmla="*/ 18288 h 18288"/>
-              <a:gd name="connsiteX7" fmla="*/ 2538974 w 3255095"/>
-              <a:gd name="connsiteY7" fmla="*/ 18288 h 18288"/>
-              <a:gd name="connsiteX8" fmla="*/ 1822853 w 3255095"/>
-              <a:gd name="connsiteY8" fmla="*/ 18288 h 18288"/>
-              <a:gd name="connsiteX9" fmla="*/ 1171834 w 3255095"/>
-              <a:gd name="connsiteY9" fmla="*/ 18288 h 18288"/>
-              <a:gd name="connsiteX10" fmla="*/ 0 w 3255095"/>
-              <a:gd name="connsiteY10" fmla="*/ 18288 h 18288"/>
-              <a:gd name="connsiteX11" fmla="*/ 0 w 3255095"/>
-              <a:gd name="connsiteY11" fmla="*/ 0 h 18288"/>
+              <a:gd name="csX0" fmla="*/ 0 w 3255095"/>
+              <a:gd name="csY0" fmla="*/ 0 h 18288"/>
+              <a:gd name="csX1" fmla="*/ 618468 w 3255095"/>
+              <a:gd name="csY1" fmla="*/ 0 h 18288"/>
+              <a:gd name="csX2" fmla="*/ 1269487 w 3255095"/>
+              <a:gd name="csY2" fmla="*/ 0 h 18288"/>
+              <a:gd name="csX3" fmla="*/ 1953057 w 3255095"/>
+              <a:gd name="csY3" fmla="*/ 0 h 18288"/>
+              <a:gd name="csX4" fmla="*/ 2636627 w 3255095"/>
+              <a:gd name="csY4" fmla="*/ 0 h 18288"/>
+              <a:gd name="csX5" fmla="*/ 3255095 w 3255095"/>
+              <a:gd name="csY5" fmla="*/ 0 h 18288"/>
+              <a:gd name="csX6" fmla="*/ 3255095 w 3255095"/>
+              <a:gd name="csY6" fmla="*/ 18288 h 18288"/>
+              <a:gd name="csX7" fmla="*/ 2538974 w 3255095"/>
+              <a:gd name="csY7" fmla="*/ 18288 h 18288"/>
+              <a:gd name="csX8" fmla="*/ 1822853 w 3255095"/>
+              <a:gd name="csY8" fmla="*/ 18288 h 18288"/>
+              <a:gd name="csX9" fmla="*/ 1171834 w 3255095"/>
+              <a:gd name="csY9" fmla="*/ 18288 h 18288"/>
+              <a:gd name="csX10" fmla="*/ 0 w 3255095"/>
+              <a:gd name="csY10" fmla="*/ 18288 h 18288"/>
+              <a:gd name="csX11" fmla="*/ 0 w 3255095"/>
+              <a:gd name="csY11" fmla="*/ 0 h 18288"/>
             </a:gdLst>
             <a:ahLst/>
             <a:cxnLst>
               <a:cxn ang="0">
-                <a:pos x="connsiteX0" y="connsiteY0"/>
-              </a:cxn>
-              <a:cxn ang="0">
-                <a:pos x="connsiteX1" y="connsiteY1"/>
-              </a:cxn>
-              <a:cxn ang="0">
-                <a:pos x="connsiteX2" y="connsiteY2"/>
-              </a:cxn>
-              <a:cxn ang="0">
-                <a:pos x="connsiteX3" y="connsiteY3"/>
-              </a:cxn>
-              <a:cxn ang="0">
-                <a:pos x="connsiteX4" y="connsiteY4"/>
-              </a:cxn>
-              <a:cxn ang="0">
-                <a:pos x="connsiteX5" y="connsiteY5"/>
-              </a:cxn>
-              <a:cxn ang="0">
-                <a:pos x="connsiteX6" y="connsiteY6"/>
-              </a:cxn>
-              <a:cxn ang="0">
-                <a:pos x="connsiteX7" y="connsiteY7"/>
-              </a:cxn>
-              <a:cxn ang="0">
-                <a:pos x="connsiteX8" y="connsiteY8"/>
-              </a:cxn>
-              <a:cxn ang="0">
-                <a:pos x="connsiteX9" y="connsiteY9"/>
-              </a:cxn>
-              <a:cxn ang="0">
-                <a:pos x="connsiteX10" y="connsiteY10"/>
-              </a:cxn>
-              <a:cxn ang="0">
-                <a:pos x="connsiteX11" y="connsiteY11"/>
+                <a:pos x="csX0" y="csY0"/>
+              </a:cxn>
+              <a:cxn ang="0">
+                <a:pos x="csX1" y="csY1"/>
+              </a:cxn>
+              <a:cxn ang="0">
+                <a:pos x="csX2" y="csY2"/>
+              </a:cxn>
+              <a:cxn ang="0">
+                <a:pos x="csX3" y="csY3"/>
+              </a:cxn>
+              <a:cxn ang="0">
+                <a:pos x="csX4" y="csY4"/>
+              </a:cxn>
+              <a:cxn ang="0">
+                <a:pos x="csX5" y="csY5"/>
+              </a:cxn>
+              <a:cxn ang="0">
+                <a:pos x="csX6" y="csY6"/>
+              </a:cxn>
+              <a:cxn ang="0">
+                <a:pos x="csX7" y="csY7"/>
+              </a:cxn>
+              <a:cxn ang="0">
+                <a:pos x="csX8" y="csY8"/>
+              </a:cxn>
+              <a:cxn ang="0">
+                <a:pos x="csX9" y="csY9"/>
+              </a:cxn>
+              <a:cxn ang="0">
+                <a:pos x="csX10" y="csY10"/>
+              </a:cxn>
+              <a:cxn ang="0">
+                <a:pos x="csX11" y="csY11"/>
               </a:cxn>
             </a:cxnLst>
             <a:rect l="l" t="t" r="r" b="b"/>
@@ -5039,68 +5039,68 @@
           <a:custGeom>
             <a:avLst/>
             <a:gdLst>
-              <a:gd name="connsiteX0" fmla="*/ 0 w 3255095"/>
-              <a:gd name="connsiteY0" fmla="*/ 0 h 18288"/>
-              <a:gd name="connsiteX1" fmla="*/ 618468 w 3255095"/>
-              <a:gd name="connsiteY1" fmla="*/ 0 h 18288"/>
-              <a:gd name="connsiteX2" fmla="*/ 1269487 w 3255095"/>
-              <a:gd name="connsiteY2" fmla="*/ 0 h 18288"/>
-              <a:gd name="connsiteX3" fmla="*/ 1953057 w 3255095"/>
-              <a:gd name="connsiteY3" fmla="*/ 0 h 18288"/>
-              <a:gd name="connsiteX4" fmla="*/ 2636627 w 3255095"/>
-              <a:gd name="connsiteY4" fmla="*/ 0 h 18288"/>
-              <a:gd name="connsiteX5" fmla="*/ 3255095 w 3255095"/>
-              <a:gd name="connsiteY5" fmla="*/ 0 h 18288"/>
-              <a:gd name="connsiteX6" fmla="*/ 3255095 w 3255095"/>
-              <a:gd name="connsiteY6" fmla="*/ 18288 h 18288"/>
-              <a:gd name="connsiteX7" fmla="*/ 2538974 w 3255095"/>
-              <a:gd name="connsiteY7" fmla="*/ 18288 h 18288"/>
-              <a:gd name="connsiteX8" fmla="*/ 1822853 w 3255095"/>
-              <a:gd name="connsiteY8" fmla="*/ 18288 h 18288"/>
-              <a:gd name="connsiteX9" fmla="*/ 1171834 w 3255095"/>
-              <a:gd name="connsiteY9" fmla="*/ 18288 h 18288"/>
-              <a:gd name="connsiteX10" fmla="*/ 0 w 3255095"/>
-              <a:gd name="connsiteY10" fmla="*/ 18288 h 18288"/>
-              <a:gd name="connsiteX11" fmla="*/ 0 w 3255095"/>
-              <a:gd name="connsiteY11" fmla="*/ 0 h 18288"/>
+              <a:gd name="csX0" fmla="*/ 0 w 3255095"/>
+              <a:gd name="csY0" fmla="*/ 0 h 18288"/>
+              <a:gd name="csX1" fmla="*/ 618468 w 3255095"/>
+              <a:gd name="csY1" fmla="*/ 0 h 18288"/>
+              <a:gd name="csX2" fmla="*/ 1269487 w 3255095"/>
+              <a:gd name="csY2" fmla="*/ 0 h 18288"/>
+              <a:gd name="csX3" fmla="*/ 1953057 w 3255095"/>
+              <a:gd name="csY3" fmla="*/ 0 h 18288"/>
+              <a:gd name="csX4" fmla="*/ 2636627 w 3255095"/>
+              <a:gd name="csY4" fmla="*/ 0 h 18288"/>
+              <a:gd name="csX5" fmla="*/ 3255095 w 3255095"/>
+              <a:gd name="csY5" fmla="*/ 0 h 18288"/>
+              <a:gd name="csX6" fmla="*/ 3255095 w 3255095"/>
+              <a:gd name="csY6" fmla="*/ 18288 h 18288"/>
+              <a:gd name="csX7" fmla="*/ 2538974 w 3255095"/>
+              <a:gd name="csY7" fmla="*/ 18288 h 18288"/>
+              <a:gd name="csX8" fmla="*/ 1822853 w 3255095"/>
+              <a:gd name="csY8" fmla="*/ 18288 h 18288"/>
+              <a:gd name="csX9" fmla="*/ 1171834 w 3255095"/>
+              <a:gd name="csY9" fmla="*/ 18288 h 18288"/>
+              <a:gd name="csX10" fmla="*/ 0 w 3255095"/>
+              <a:gd name="csY10" fmla="*/ 18288 h 18288"/>
+              <a:gd name="csX11" fmla="*/ 0 w 3255095"/>
+              <a:gd name="csY11" fmla="*/ 0 h 18288"/>
             </a:gdLst>
             <a:ahLst/>
             <a:cxnLst>
               <a:cxn ang="0">
-                <a:pos x="connsiteX0" y="connsiteY0"/>
-              </a:cxn>
-              <a:cxn ang="0">
-                <a:pos x="connsiteX1" y="connsiteY1"/>
-              </a:cxn>
-              <a:cxn ang="0">
-                <a:pos x="connsiteX2" y="connsiteY2"/>
-              </a:cxn>
-              <a:cxn ang="0">
-                <a:pos x="connsiteX3" y="connsiteY3"/>
-              </a:cxn>
-              <a:cxn ang="0">
-                <a:pos x="connsiteX4" y="connsiteY4"/>
-              </a:cxn>
-              <a:cxn ang="0">
-                <a:pos x="connsiteX5" y="connsiteY5"/>
-              </a:cxn>
-              <a:cxn ang="0">
-                <a:pos x="connsiteX6" y="connsiteY6"/>
-              </a:cxn>
-              <a:cxn ang="0">
-                <a:pos x="connsiteX7" y="connsiteY7"/>
-              </a:cxn>
-              <a:cxn ang="0">
-                <a:pos x="connsiteX8" y="connsiteY8"/>
-              </a:cxn>
-              <a:cxn ang="0">
-                <a:pos x="connsiteX9" y="connsiteY9"/>
-              </a:cxn>
-              <a:cxn ang="0">
-                <a:pos x="connsiteX10" y="connsiteY10"/>
-              </a:cxn>
-              <a:cxn ang="0">
-                <a:pos x="connsiteX11" y="connsiteY11"/>
+                <a:pos x="csX0" y="csY0"/>
+              </a:cxn>
+              <a:cxn ang="0">
+                <a:pos x="csX1" y="csY1"/>
+              </a:cxn>
+              <a:cxn ang="0">
+                <a:pos x="csX2" y="csY2"/>
+              </a:cxn>
+              <a:cxn ang="0">
+                <a:pos x="csX3" y="csY3"/>
+              </a:cxn>
+              <a:cxn ang="0">
+                <a:pos x="csX4" y="csY4"/>
+              </a:cxn>
+              <a:cxn ang="0">
+                <a:pos x="csX5" y="csY5"/>
+              </a:cxn>
+              <a:cxn ang="0">
+                <a:pos x="csX6" y="csY6"/>
+              </a:cxn>
+              <a:cxn ang="0">
+                <a:pos x="csX7" y="csY7"/>
+              </a:cxn>
+              <a:cxn ang="0">
+                <a:pos x="csX8" y="csY8"/>
+              </a:cxn>
+              <a:cxn ang="0">
+                <a:pos x="csX9" y="csY9"/>
+              </a:cxn>
+              <a:cxn ang="0">
+                <a:pos x="csX10" y="csY10"/>
+              </a:cxn>
+              <a:cxn ang="0">
+                <a:pos x="csX11" y="csY11"/>
               </a:cxn>
             </a:cxnLst>
             <a:rect l="l" t="t" r="r" b="b"/>
@@ -5808,68 +5808,68 @@
           <a:custGeom>
             <a:avLst/>
             <a:gdLst>
-              <a:gd name="connsiteX0" fmla="*/ 0 w 3255095"/>
-              <a:gd name="connsiteY0" fmla="*/ 0 h 18288"/>
-              <a:gd name="connsiteX1" fmla="*/ 618468 w 3255095"/>
-              <a:gd name="connsiteY1" fmla="*/ 0 h 18288"/>
-              <a:gd name="connsiteX2" fmla="*/ 1269487 w 3255095"/>
-              <a:gd name="connsiteY2" fmla="*/ 0 h 18288"/>
-              <a:gd name="connsiteX3" fmla="*/ 1953057 w 3255095"/>
-              <a:gd name="connsiteY3" fmla="*/ 0 h 18288"/>
-              <a:gd name="connsiteX4" fmla="*/ 2636627 w 3255095"/>
-              <a:gd name="connsiteY4" fmla="*/ 0 h 18288"/>
-              <a:gd name="connsiteX5" fmla="*/ 3255095 w 3255095"/>
-              <a:gd name="connsiteY5" fmla="*/ 0 h 18288"/>
-              <a:gd name="connsiteX6" fmla="*/ 3255095 w 3255095"/>
-              <a:gd name="connsiteY6" fmla="*/ 18288 h 18288"/>
-              <a:gd name="connsiteX7" fmla="*/ 2538974 w 3255095"/>
-              <a:gd name="connsiteY7" fmla="*/ 18288 h 18288"/>
-              <a:gd name="connsiteX8" fmla="*/ 1822853 w 3255095"/>
-              <a:gd name="connsiteY8" fmla="*/ 18288 h 18288"/>
-              <a:gd name="connsiteX9" fmla="*/ 1171834 w 3255095"/>
-              <a:gd name="connsiteY9" fmla="*/ 18288 h 18288"/>
-              <a:gd name="connsiteX10" fmla="*/ 0 w 3255095"/>
-              <a:gd name="connsiteY10" fmla="*/ 18288 h 18288"/>
-              <a:gd name="connsiteX11" fmla="*/ 0 w 3255095"/>
-              <a:gd name="connsiteY11" fmla="*/ 0 h 18288"/>
+              <a:gd name="csX0" fmla="*/ 0 w 3255095"/>
+              <a:gd name="csY0" fmla="*/ 0 h 18288"/>
+              <a:gd name="csX1" fmla="*/ 618468 w 3255095"/>
+              <a:gd name="csY1" fmla="*/ 0 h 18288"/>
+              <a:gd name="csX2" fmla="*/ 1269487 w 3255095"/>
+              <a:gd name="csY2" fmla="*/ 0 h 18288"/>
+              <a:gd name="csX3" fmla="*/ 1953057 w 3255095"/>
+              <a:gd name="csY3" fmla="*/ 0 h 18288"/>
+              <a:gd name="csX4" fmla="*/ 2636627 w 3255095"/>
+              <a:gd name="csY4" fmla="*/ 0 h 18288"/>
+              <a:gd name="csX5" fmla="*/ 3255095 w 3255095"/>
+              <a:gd name="csY5" fmla="*/ 0 h 18288"/>
+              <a:gd name="csX6" fmla="*/ 3255095 w 3255095"/>
+              <a:gd name="csY6" fmla="*/ 18288 h 18288"/>
+              <a:gd name="csX7" fmla="*/ 2538974 w 3255095"/>
+              <a:gd name="csY7" fmla="*/ 18288 h 18288"/>
+              <a:gd name="csX8" fmla="*/ 1822853 w 3255095"/>
+              <a:gd name="csY8" fmla="*/ 18288 h 18288"/>
+              <a:gd name="csX9" fmla="*/ 1171834 w 3255095"/>
+              <a:gd name="csY9" fmla="*/ 18288 h 18288"/>
+              <a:gd name="csX10" fmla="*/ 0 w 3255095"/>
+              <a:gd name="csY10" fmla="*/ 18288 h 18288"/>
+              <a:gd name="csX11" fmla="*/ 0 w 3255095"/>
+              <a:gd name="csY11" fmla="*/ 0 h 18288"/>
             </a:gdLst>
             <a:ahLst/>
             <a:cxnLst>
               <a:cxn ang="0">
-                <a:pos x="connsiteX0" y="connsiteY0"/>
-              </a:cxn>
-              <a:cxn ang="0">
-                <a:pos x="connsiteX1" y="connsiteY1"/>
-              </a:cxn>
-              <a:cxn ang="0">
-                <a:pos x="connsiteX2" y="connsiteY2"/>
-              </a:cxn>
-              <a:cxn ang="0">
-                <a:pos x="connsiteX3" y="connsiteY3"/>
-              </a:cxn>
-              <a:cxn ang="0">
-                <a:pos x="connsiteX4" y="connsiteY4"/>
-              </a:cxn>
-              <a:cxn ang="0">
-                <a:pos x="connsiteX5" y="connsiteY5"/>
-              </a:cxn>
-              <a:cxn ang="0">
-                <a:pos x="connsiteX6" y="connsiteY6"/>
-              </a:cxn>
-              <a:cxn ang="0">
-                <a:pos x="connsiteX7" y="connsiteY7"/>
-              </a:cxn>
-              <a:cxn ang="0">
-                <a:pos x="connsiteX8" y="connsiteY8"/>
-              </a:cxn>
-              <a:cxn ang="0">
-                <a:pos x="connsiteX9" y="connsiteY9"/>
-              </a:cxn>
-              <a:cxn ang="0">
-                <a:pos x="connsiteX10" y="connsiteY10"/>
-              </a:cxn>
-              <a:cxn ang="0">
-                <a:pos x="connsiteX11" y="connsiteY11"/>
+                <a:pos x="csX0" y="csY0"/>
+              </a:cxn>
+              <a:cxn ang="0">
+                <a:pos x="csX1" y="csY1"/>
+              </a:cxn>
+              <a:cxn ang="0">
+                <a:pos x="csX2" y="csY2"/>
+              </a:cxn>
+              <a:cxn ang="0">
+                <a:pos x="csX3" y="csY3"/>
+              </a:cxn>
+              <a:cxn ang="0">
+                <a:pos x="csX4" y="csY4"/>
+              </a:cxn>
+              <a:cxn ang="0">
+                <a:pos x="csX5" y="csY5"/>
+              </a:cxn>
+              <a:cxn ang="0">
+                <a:pos x="csX6" y="csY6"/>
+              </a:cxn>
+              <a:cxn ang="0">
+                <a:pos x="csX7" y="csY7"/>
+              </a:cxn>
+              <a:cxn ang="0">
+                <a:pos x="csX8" y="csY8"/>
+              </a:cxn>
+              <a:cxn ang="0">
+                <a:pos x="csX9" y="csY9"/>
+              </a:cxn>
+              <a:cxn ang="0">
+                <a:pos x="csX10" y="csY10"/>
+              </a:cxn>
+              <a:cxn ang="0">
+                <a:pos x="csX11" y="csY11"/>
               </a:cxn>
             </a:cxnLst>
             <a:rect l="l" t="t" r="r" b="b"/>
@@ -6468,13 +6468,13 @@
           <p:nvPr/>
         </p:nvPicPr>
         <p:blipFill>
-          <a:blip r:embed="rId6">
+          <a:blip>
             <a:extLst>
               <a:ext uri="{28A0092B-C50C-407E-A947-70E740481C1C}">
                 <a14:useLocalDpi xmlns:a14="http://schemas.microsoft.com/office/drawing/2010/main" val="0"/>
               </a:ext>
               <a:ext uri="{96DAC541-7B7A-43D3-8B79-37D633B846F1}">
-                <asvg:svgBlip xmlns:asvg="http://schemas.microsoft.com/office/drawing/2016/SVG/main" r:embed="rId7"/>
+                <asvg:svgBlip xmlns:asvg="http://schemas.microsoft.com/office/drawing/2016/SVG/main" r:embed="rId6"/>
               </a:ext>
             </a:extLst>
           </a:blip>
@@ -6663,68 +6663,68 @@
           <a:custGeom>
             <a:avLst/>
             <a:gdLst>
-              <a:gd name="connsiteX0" fmla="*/ 0 w 3255095"/>
-              <a:gd name="connsiteY0" fmla="*/ 0 h 18288"/>
-              <a:gd name="connsiteX1" fmla="*/ 618468 w 3255095"/>
-              <a:gd name="connsiteY1" fmla="*/ 0 h 18288"/>
-              <a:gd name="connsiteX2" fmla="*/ 1269487 w 3255095"/>
-              <a:gd name="connsiteY2" fmla="*/ 0 h 18288"/>
-              <a:gd name="connsiteX3" fmla="*/ 1953057 w 3255095"/>
-              <a:gd name="connsiteY3" fmla="*/ 0 h 18288"/>
-              <a:gd name="connsiteX4" fmla="*/ 2636627 w 3255095"/>
-              <a:gd name="connsiteY4" fmla="*/ 0 h 18288"/>
-              <a:gd name="connsiteX5" fmla="*/ 3255095 w 3255095"/>
-              <a:gd name="connsiteY5" fmla="*/ 0 h 18288"/>
-              <a:gd name="connsiteX6" fmla="*/ 3255095 w 3255095"/>
-              <a:gd name="connsiteY6" fmla="*/ 18288 h 18288"/>
-              <a:gd name="connsiteX7" fmla="*/ 2538974 w 3255095"/>
-              <a:gd name="connsiteY7" fmla="*/ 18288 h 18288"/>
-              <a:gd name="connsiteX8" fmla="*/ 1822853 w 3255095"/>
-              <a:gd name="connsiteY8" fmla="*/ 18288 h 18288"/>
-              <a:gd name="connsiteX9" fmla="*/ 1171834 w 3255095"/>
-              <a:gd name="connsiteY9" fmla="*/ 18288 h 18288"/>
-              <a:gd name="connsiteX10" fmla="*/ 0 w 3255095"/>
-              <a:gd name="connsiteY10" fmla="*/ 18288 h 18288"/>
-              <a:gd name="connsiteX11" fmla="*/ 0 w 3255095"/>
-              <a:gd name="connsiteY11" fmla="*/ 0 h 18288"/>
+              <a:gd name="csX0" fmla="*/ 0 w 3255095"/>
+              <a:gd name="csY0" fmla="*/ 0 h 18288"/>
+              <a:gd name="csX1" fmla="*/ 618468 w 3255095"/>
+              <a:gd name="csY1" fmla="*/ 0 h 18288"/>
+              <a:gd name="csX2" fmla="*/ 1269487 w 3255095"/>
+              <a:gd name="csY2" fmla="*/ 0 h 18288"/>
+              <a:gd name="csX3" fmla="*/ 1953057 w 3255095"/>
+              <a:gd name="csY3" fmla="*/ 0 h 18288"/>
+              <a:gd name="csX4" fmla="*/ 2636627 w 3255095"/>
+              <a:gd name="csY4" fmla="*/ 0 h 18288"/>
+              <a:gd name="csX5" fmla="*/ 3255095 w 3255095"/>
+              <a:gd name="csY5" fmla="*/ 0 h 18288"/>
+              <a:gd name="csX6" fmla="*/ 3255095 w 3255095"/>
+              <a:gd name="csY6" fmla="*/ 18288 h 18288"/>
+              <a:gd name="csX7" fmla="*/ 2538974 w 3255095"/>
+              <a:gd name="csY7" fmla="*/ 18288 h 18288"/>
+              <a:gd name="csX8" fmla="*/ 1822853 w 3255095"/>
+              <a:gd name="csY8" fmla="*/ 18288 h 18288"/>
+              <a:gd name="csX9" fmla="*/ 1171834 w 3255095"/>
+              <a:gd name="csY9" fmla="*/ 18288 h 18288"/>
+              <a:gd name="csX10" fmla="*/ 0 w 3255095"/>
+              <a:gd name="csY10" fmla="*/ 18288 h 18288"/>
+              <a:gd name="csX11" fmla="*/ 0 w 3255095"/>
+              <a:gd name="csY11" fmla="*/ 0 h 18288"/>
             </a:gdLst>
             <a:ahLst/>
             <a:cxnLst>
               <a:cxn ang="0">
-                <a:pos x="connsiteX0" y="connsiteY0"/>
-              </a:cxn>
-              <a:cxn ang="0">
-                <a:pos x="connsiteX1" y="connsiteY1"/>
-              </a:cxn>
-              <a:cxn ang="0">
-                <a:pos x="connsiteX2" y="connsiteY2"/>
-              </a:cxn>
-              <a:cxn ang="0">
-                <a:pos x="connsiteX3" y="connsiteY3"/>
-              </a:cxn>
-              <a:cxn ang="0">
-                <a:pos x="connsiteX4" y="connsiteY4"/>
-              </a:cxn>
-              <a:cxn ang="0">
-                <a:pos x="connsiteX5" y="connsiteY5"/>
-              </a:cxn>
-              <a:cxn ang="0">
-                <a:pos x="connsiteX6" y="connsiteY6"/>
-              </a:cxn>
-              <a:cxn ang="0">
-                <a:pos x="connsiteX7" y="connsiteY7"/>
-              </a:cxn>
-              <a:cxn ang="0">
-                <a:pos x="connsiteX8" y="connsiteY8"/>
-              </a:cxn>
-              <a:cxn ang="0">
-                <a:pos x="connsiteX9" y="connsiteY9"/>
-              </a:cxn>
-              <a:cxn ang="0">
-                <a:pos x="connsiteX10" y="connsiteY10"/>
-              </a:cxn>
-              <a:cxn ang="0">
-                <a:pos x="connsiteX11" y="connsiteY11"/>
+                <a:pos x="csX0" y="csY0"/>
+              </a:cxn>
+              <a:cxn ang="0">
+                <a:pos x="csX1" y="csY1"/>
+              </a:cxn>
+              <a:cxn ang="0">
+                <a:pos x="csX2" y="csY2"/>
+              </a:cxn>
+              <a:cxn ang="0">
+                <a:pos x="csX3" y="csY3"/>
+              </a:cxn>
+              <a:cxn ang="0">
+                <a:pos x="csX4" y="csY4"/>
+              </a:cxn>
+              <a:cxn ang="0">
+                <a:pos x="csX5" y="csY5"/>
+              </a:cxn>
+              <a:cxn ang="0">
+                <a:pos x="csX6" y="csY6"/>
+              </a:cxn>
+              <a:cxn ang="0">
+                <a:pos x="csX7" y="csY7"/>
+              </a:cxn>
+              <a:cxn ang="0">
+                <a:pos x="csX8" y="csY8"/>
+              </a:cxn>
+              <a:cxn ang="0">
+                <a:pos x="csX9" y="csY9"/>
+              </a:cxn>
+              <a:cxn ang="0">
+                <a:pos x="csX10" y="csY10"/>
+              </a:cxn>
+              <a:cxn ang="0">
+                <a:pos x="csX11" y="csY11"/>
               </a:cxn>
             </a:cxnLst>
             <a:rect l="l" t="t" r="r" b="b"/>
@@ -7092,13 +7092,13 @@
           <p:nvPr/>
         </p:nvPicPr>
         <p:blipFill>
-          <a:blip r:embed="rId3">
+          <a:blip>
             <a:extLst>
               <a:ext uri="{28A0092B-C50C-407E-A947-70E740481C1C}">
                 <a14:useLocalDpi xmlns:a14="http://schemas.microsoft.com/office/drawing/2010/main" val="0"/>
               </a:ext>
               <a:ext uri="{96DAC541-7B7A-43D3-8B79-37D633B846F1}">
-                <asvg:svgBlip xmlns:asvg="http://schemas.microsoft.com/office/drawing/2016/SVG/main" r:embed="rId4"/>
+                <asvg:svgBlip xmlns:asvg="http://schemas.microsoft.com/office/drawing/2016/SVG/main" r:embed="rId3"/>
               </a:ext>
             </a:extLst>
           </a:blip>
@@ -7131,13 +7131,13 @@
           <p:nvPr/>
         </p:nvPicPr>
         <p:blipFill>
-          <a:blip r:embed="rId5">
+          <a:blip>
             <a:extLst>
               <a:ext uri="{28A0092B-C50C-407E-A947-70E740481C1C}">
                 <a14:useLocalDpi xmlns:a14="http://schemas.microsoft.com/office/drawing/2010/main" val="0"/>
               </a:ext>
               <a:ext uri="{96DAC541-7B7A-43D3-8B79-37D633B846F1}">
-                <asvg:svgBlip xmlns:asvg="http://schemas.microsoft.com/office/drawing/2016/SVG/main" r:embed="rId6"/>
+                <asvg:svgBlip xmlns:asvg="http://schemas.microsoft.com/office/drawing/2016/SVG/main" r:embed="rId4"/>
               </a:ext>
             </a:extLst>
           </a:blip>
@@ -7326,68 +7326,68 @@
           <a:custGeom>
             <a:avLst/>
             <a:gdLst>
-              <a:gd name="connsiteX0" fmla="*/ 0 w 3255095"/>
-              <a:gd name="connsiteY0" fmla="*/ 0 h 18288"/>
-              <a:gd name="connsiteX1" fmla="*/ 618468 w 3255095"/>
-              <a:gd name="connsiteY1" fmla="*/ 0 h 18288"/>
-              <a:gd name="connsiteX2" fmla="*/ 1269487 w 3255095"/>
-              <a:gd name="connsiteY2" fmla="*/ 0 h 18288"/>
-              <a:gd name="connsiteX3" fmla="*/ 1953057 w 3255095"/>
-              <a:gd name="connsiteY3" fmla="*/ 0 h 18288"/>
-              <a:gd name="connsiteX4" fmla="*/ 2636627 w 3255095"/>
-              <a:gd name="connsiteY4" fmla="*/ 0 h 18288"/>
-              <a:gd name="connsiteX5" fmla="*/ 3255095 w 3255095"/>
-              <a:gd name="connsiteY5" fmla="*/ 0 h 18288"/>
-              <a:gd name="connsiteX6" fmla="*/ 3255095 w 3255095"/>
-              <a:gd name="connsiteY6" fmla="*/ 18288 h 18288"/>
-              <a:gd name="connsiteX7" fmla="*/ 2538974 w 3255095"/>
-              <a:gd name="connsiteY7" fmla="*/ 18288 h 18288"/>
-              <a:gd name="connsiteX8" fmla="*/ 1822853 w 3255095"/>
-              <a:gd name="connsiteY8" fmla="*/ 18288 h 18288"/>
-              <a:gd name="connsiteX9" fmla="*/ 1171834 w 3255095"/>
-              <a:gd name="connsiteY9" fmla="*/ 18288 h 18288"/>
-              <a:gd name="connsiteX10" fmla="*/ 0 w 3255095"/>
-              <a:gd name="connsiteY10" fmla="*/ 18288 h 18288"/>
-              <a:gd name="connsiteX11" fmla="*/ 0 w 3255095"/>
-              <a:gd name="connsiteY11" fmla="*/ 0 h 18288"/>
+              <a:gd name="csX0" fmla="*/ 0 w 3255095"/>
+              <a:gd name="csY0" fmla="*/ 0 h 18288"/>
+              <a:gd name="csX1" fmla="*/ 618468 w 3255095"/>
+              <a:gd name="csY1" fmla="*/ 0 h 18288"/>
+              <a:gd name="csX2" fmla="*/ 1269487 w 3255095"/>
+              <a:gd name="csY2" fmla="*/ 0 h 18288"/>
+              <a:gd name="csX3" fmla="*/ 1953057 w 3255095"/>
+              <a:gd name="csY3" fmla="*/ 0 h 18288"/>
+              <a:gd name="csX4" fmla="*/ 2636627 w 3255095"/>
+              <a:gd name="csY4" fmla="*/ 0 h 18288"/>
+              <a:gd name="csX5" fmla="*/ 3255095 w 3255095"/>
+              <a:gd name="csY5" fmla="*/ 0 h 18288"/>
+              <a:gd name="csX6" fmla="*/ 3255095 w 3255095"/>
+              <a:gd name="csY6" fmla="*/ 18288 h 18288"/>
+              <a:gd name="csX7" fmla="*/ 2538974 w 3255095"/>
+              <a:gd name="csY7" fmla="*/ 18288 h 18288"/>
+              <a:gd name="csX8" fmla="*/ 1822853 w 3255095"/>
+              <a:gd name="csY8" fmla="*/ 18288 h 18288"/>
+              <a:gd name="csX9" fmla="*/ 1171834 w 3255095"/>
+              <a:gd name="csY9" fmla="*/ 18288 h 18288"/>
+              <a:gd name="csX10" fmla="*/ 0 w 3255095"/>
+              <a:gd name="csY10" fmla="*/ 18288 h 18288"/>
+              <a:gd name="csX11" fmla="*/ 0 w 3255095"/>
+              <a:gd name="csY11" fmla="*/ 0 h 18288"/>
             </a:gdLst>
             <a:ahLst/>
             <a:cxnLst>
               <a:cxn ang="0">
-                <a:pos x="connsiteX0" y="connsiteY0"/>
-              </a:cxn>
-              <a:cxn ang="0">
-                <a:pos x="connsiteX1" y="connsiteY1"/>
-              </a:cxn>
-              <a:cxn ang="0">
-                <a:pos x="connsiteX2" y="connsiteY2"/>
-              </a:cxn>
-              <a:cxn ang="0">
-                <a:pos x="connsiteX3" y="connsiteY3"/>
-              </a:cxn>
-              <a:cxn ang="0">
-                <a:pos x="connsiteX4" y="connsiteY4"/>
-              </a:cxn>
-              <a:cxn ang="0">
-                <a:pos x="connsiteX5" y="connsiteY5"/>
-              </a:cxn>
-              <a:cxn ang="0">
-                <a:pos x="connsiteX6" y="connsiteY6"/>
-              </a:cxn>
-              <a:cxn ang="0">
-                <a:pos x="connsiteX7" y="connsiteY7"/>
-              </a:cxn>
-              <a:cxn ang="0">
-                <a:pos x="connsiteX8" y="connsiteY8"/>
-              </a:cxn>
-              <a:cxn ang="0">
-                <a:pos x="connsiteX9" y="connsiteY9"/>
-              </a:cxn>
-              <a:cxn ang="0">
-                <a:pos x="connsiteX10" y="connsiteY10"/>
-              </a:cxn>
-              <a:cxn ang="0">
-                <a:pos x="connsiteX11" y="connsiteY11"/>
+                <a:pos x="csX0" y="csY0"/>
+              </a:cxn>
+              <a:cxn ang="0">
+                <a:pos x="csX1" y="csY1"/>
+              </a:cxn>
+              <a:cxn ang="0">
+                <a:pos x="csX2" y="csY2"/>
+              </a:cxn>
+              <a:cxn ang="0">
+                <a:pos x="csX3" y="csY3"/>
+              </a:cxn>
+              <a:cxn ang="0">
+                <a:pos x="csX4" y="csY4"/>
+              </a:cxn>
+              <a:cxn ang="0">
+                <a:pos x="csX5" y="csY5"/>
+              </a:cxn>
+              <a:cxn ang="0">
+                <a:pos x="csX6" y="csY6"/>
+              </a:cxn>
+              <a:cxn ang="0">
+                <a:pos x="csX7" y="csY7"/>
+              </a:cxn>
+              <a:cxn ang="0">
+                <a:pos x="csX8" y="csY8"/>
+              </a:cxn>
+              <a:cxn ang="0">
+                <a:pos x="csX9" y="csY9"/>
+              </a:cxn>
+              <a:cxn ang="0">
+                <a:pos x="csX10" y="csY10"/>
+              </a:cxn>
+              <a:cxn ang="0">
+                <a:pos x="csX11" y="csY11"/>
               </a:cxn>
             </a:cxnLst>
             <a:rect l="l" t="t" r="r" b="b"/>
@@ -7770,103 +7770,103 @@
           <a:custGeom>
             <a:avLst/>
             <a:gdLst>
-              <a:gd name="connsiteX0" fmla="*/ 0 w 5410200"/>
-              <a:gd name="connsiteY0" fmla="*/ 0 h 18288"/>
-              <a:gd name="connsiteX1" fmla="*/ 568071 w 5410200"/>
-              <a:gd name="connsiteY1" fmla="*/ 0 h 18288"/>
-              <a:gd name="connsiteX2" fmla="*/ 1298448 w 5410200"/>
-              <a:gd name="connsiteY2" fmla="*/ 0 h 18288"/>
-              <a:gd name="connsiteX3" fmla="*/ 1920621 w 5410200"/>
-              <a:gd name="connsiteY3" fmla="*/ 0 h 18288"/>
-              <a:gd name="connsiteX4" fmla="*/ 2488692 w 5410200"/>
-              <a:gd name="connsiteY4" fmla="*/ 0 h 18288"/>
-              <a:gd name="connsiteX5" fmla="*/ 3219069 w 5410200"/>
-              <a:gd name="connsiteY5" fmla="*/ 0 h 18288"/>
-              <a:gd name="connsiteX6" fmla="*/ 3895344 w 5410200"/>
-              <a:gd name="connsiteY6" fmla="*/ 0 h 18288"/>
-              <a:gd name="connsiteX7" fmla="*/ 4571619 w 5410200"/>
-              <a:gd name="connsiteY7" fmla="*/ 0 h 18288"/>
-              <a:gd name="connsiteX8" fmla="*/ 5410200 w 5410200"/>
-              <a:gd name="connsiteY8" fmla="*/ 0 h 18288"/>
-              <a:gd name="connsiteX9" fmla="*/ 5410200 w 5410200"/>
-              <a:gd name="connsiteY9" fmla="*/ 18288 h 18288"/>
-              <a:gd name="connsiteX10" fmla="*/ 4842129 w 5410200"/>
-              <a:gd name="connsiteY10" fmla="*/ 18288 h 18288"/>
-              <a:gd name="connsiteX11" fmla="*/ 4328160 w 5410200"/>
-              <a:gd name="connsiteY11" fmla="*/ 18288 h 18288"/>
-              <a:gd name="connsiteX12" fmla="*/ 3597783 w 5410200"/>
-              <a:gd name="connsiteY12" fmla="*/ 18288 h 18288"/>
-              <a:gd name="connsiteX13" fmla="*/ 3029712 w 5410200"/>
-              <a:gd name="connsiteY13" fmla="*/ 18288 h 18288"/>
-              <a:gd name="connsiteX14" fmla="*/ 2299335 w 5410200"/>
-              <a:gd name="connsiteY14" fmla="*/ 18288 h 18288"/>
-              <a:gd name="connsiteX15" fmla="*/ 1514856 w 5410200"/>
-              <a:gd name="connsiteY15" fmla="*/ 18288 h 18288"/>
-              <a:gd name="connsiteX16" fmla="*/ 892683 w 5410200"/>
-              <a:gd name="connsiteY16" fmla="*/ 18288 h 18288"/>
-              <a:gd name="connsiteX17" fmla="*/ 0 w 5410200"/>
-              <a:gd name="connsiteY17" fmla="*/ 18288 h 18288"/>
-              <a:gd name="connsiteX18" fmla="*/ 0 w 5410200"/>
-              <a:gd name="connsiteY18" fmla="*/ 0 h 18288"/>
+              <a:gd name="csX0" fmla="*/ 0 w 5410200"/>
+              <a:gd name="csY0" fmla="*/ 0 h 18288"/>
+              <a:gd name="csX1" fmla="*/ 568071 w 5410200"/>
+              <a:gd name="csY1" fmla="*/ 0 h 18288"/>
+              <a:gd name="csX2" fmla="*/ 1298448 w 5410200"/>
+              <a:gd name="csY2" fmla="*/ 0 h 18288"/>
+              <a:gd name="csX3" fmla="*/ 1920621 w 5410200"/>
+              <a:gd name="csY3" fmla="*/ 0 h 18288"/>
+              <a:gd name="csX4" fmla="*/ 2488692 w 5410200"/>
+              <a:gd name="csY4" fmla="*/ 0 h 18288"/>
+              <a:gd name="csX5" fmla="*/ 3219069 w 5410200"/>
+              <a:gd name="csY5" fmla="*/ 0 h 18288"/>
+              <a:gd name="csX6" fmla="*/ 3895344 w 5410200"/>
+              <a:gd name="csY6" fmla="*/ 0 h 18288"/>
+              <a:gd name="csX7" fmla="*/ 4571619 w 5410200"/>
+              <a:gd name="csY7" fmla="*/ 0 h 18288"/>
+              <a:gd name="csX8" fmla="*/ 5410200 w 5410200"/>
+              <a:gd name="csY8" fmla="*/ 0 h 18288"/>
+              <a:gd name="csX9" fmla="*/ 5410200 w 5410200"/>
+              <a:gd name="csY9" fmla="*/ 18288 h 18288"/>
+              <a:gd name="csX10" fmla="*/ 4842129 w 5410200"/>
+              <a:gd name="csY10" fmla="*/ 18288 h 18288"/>
+              <a:gd name="csX11" fmla="*/ 4328160 w 5410200"/>
+              <a:gd name="csY11" fmla="*/ 18288 h 18288"/>
+              <a:gd name="csX12" fmla="*/ 3597783 w 5410200"/>
+              <a:gd name="csY12" fmla="*/ 18288 h 18288"/>
+              <a:gd name="csX13" fmla="*/ 3029712 w 5410200"/>
+              <a:gd name="csY13" fmla="*/ 18288 h 18288"/>
+              <a:gd name="csX14" fmla="*/ 2299335 w 5410200"/>
+              <a:gd name="csY14" fmla="*/ 18288 h 18288"/>
+              <a:gd name="csX15" fmla="*/ 1514856 w 5410200"/>
+              <a:gd name="csY15" fmla="*/ 18288 h 18288"/>
+              <a:gd name="csX16" fmla="*/ 892683 w 5410200"/>
+              <a:gd name="csY16" fmla="*/ 18288 h 18288"/>
+              <a:gd name="csX17" fmla="*/ 0 w 5410200"/>
+              <a:gd name="csY17" fmla="*/ 18288 h 18288"/>
+              <a:gd name="csX18" fmla="*/ 0 w 5410200"/>
+              <a:gd name="csY18" fmla="*/ 0 h 18288"/>
             </a:gdLst>
             <a:ahLst/>
             <a:cxnLst>
               <a:cxn ang="0">
-                <a:pos x="connsiteX0" y="connsiteY0"/>
-              </a:cxn>
-              <a:cxn ang="0">
-                <a:pos x="connsiteX1" y="connsiteY1"/>
-              </a:cxn>
-              <a:cxn ang="0">
-                <a:pos x="connsiteX2" y="connsiteY2"/>
-              </a:cxn>
-              <a:cxn ang="0">
-                <a:pos x="connsiteX3" y="connsiteY3"/>
-              </a:cxn>
-              <a:cxn ang="0">
-                <a:pos x="connsiteX4" y="connsiteY4"/>
-              </a:cxn>
-              <a:cxn ang="0">
-                <a:pos x="connsiteX5" y="connsiteY5"/>
-              </a:cxn>
-              <a:cxn ang="0">
-                <a:pos x="connsiteX6" y="connsiteY6"/>
-              </a:cxn>
-              <a:cxn ang="0">
-                <a:pos x="connsiteX7" y="connsiteY7"/>
-              </a:cxn>
-              <a:cxn ang="0">
-                <a:pos x="connsiteX8" y="connsiteY8"/>
-              </a:cxn>
-              <a:cxn ang="0">
-                <a:pos x="connsiteX9" y="connsiteY9"/>
-              </a:cxn>
-              <a:cxn ang="0">
-                <a:pos x="connsiteX10" y="connsiteY10"/>
-              </a:cxn>
-              <a:cxn ang="0">
-                <a:pos x="connsiteX11" y="connsiteY11"/>
-              </a:cxn>
-              <a:cxn ang="0">
-                <a:pos x="connsiteX12" y="connsiteY12"/>
-              </a:cxn>
-              <a:cxn ang="0">
-                <a:pos x="connsiteX13" y="connsiteY13"/>
-              </a:cxn>
-              <a:cxn ang="0">
-                <a:pos x="connsiteX14" y="connsiteY14"/>
-              </a:cxn>
-              <a:cxn ang="0">
-                <a:pos x="connsiteX15" y="connsiteY15"/>
-              </a:cxn>
-              <a:cxn ang="0">
-                <a:pos x="connsiteX16" y="connsiteY16"/>
-              </a:cxn>
-              <a:cxn ang="0">
-                <a:pos x="connsiteX17" y="connsiteY17"/>
-              </a:cxn>
-              <a:cxn ang="0">
-                <a:pos x="connsiteX18" y="connsiteY18"/>
+                <a:pos x="csX0" y="csY0"/>
+              </a:cxn>
+              <a:cxn ang="0">
+                <a:pos x="csX1" y="csY1"/>
+              </a:cxn>
+              <a:cxn ang="0">
+                <a:pos x="csX2" y="csY2"/>
+              </a:cxn>
+              <a:cxn ang="0">
+                <a:pos x="csX3" y="csY3"/>
+              </a:cxn>
+              <a:cxn ang="0">
+                <a:pos x="csX4" y="csY4"/>
+              </a:cxn>
+              <a:cxn ang="0">
+                <a:pos x="csX5" y="csY5"/>
+              </a:cxn>
+              <a:cxn ang="0">
+                <a:pos x="csX6" y="csY6"/>
+              </a:cxn>
+              <a:cxn ang="0">
+                <a:pos x="csX7" y="csY7"/>
+              </a:cxn>
+              <a:cxn ang="0">
+                <a:pos x="csX8" y="csY8"/>
+              </a:cxn>
+              <a:cxn ang="0">
+                <a:pos x="csX9" y="csY9"/>
+              </a:cxn>
+              <a:cxn ang="0">
+                <a:pos x="csX10" y="csY10"/>
+              </a:cxn>
+              <a:cxn ang="0">
+                <a:pos x="csX11" y="csY11"/>
+              </a:cxn>
+              <a:cxn ang="0">
+                <a:pos x="csX12" y="csY12"/>
+              </a:cxn>
+              <a:cxn ang="0">
+                <a:pos x="csX13" y="csY13"/>
+              </a:cxn>
+              <a:cxn ang="0">
+                <a:pos x="csX14" y="csY14"/>
+              </a:cxn>
+              <a:cxn ang="0">
+                <a:pos x="csX15" y="csY15"/>
+              </a:cxn>
+              <a:cxn ang="0">
+                <a:pos x="csX16" y="csY16"/>
+              </a:cxn>
+              <a:cxn ang="0">
+                <a:pos x="csX17" y="csY17"/>
+              </a:cxn>
+              <a:cxn ang="0">
+                <a:pos x="csX18" y="csY18"/>
               </a:cxn>
             </a:cxnLst>
             <a:rect l="l" t="t" r="r" b="b"/>
@@ -8402,93 +8402,93 @@
           <a:custGeom>
             <a:avLst/>
             <a:gdLst>
-              <a:gd name="connsiteX0" fmla="*/ 0 w 4572000"/>
-              <a:gd name="connsiteY0" fmla="*/ 0 h 18288"/>
-              <a:gd name="connsiteX1" fmla="*/ 744583 w 4572000"/>
-              <a:gd name="connsiteY1" fmla="*/ 0 h 18288"/>
-              <a:gd name="connsiteX2" fmla="*/ 1352006 w 4572000"/>
-              <a:gd name="connsiteY2" fmla="*/ 0 h 18288"/>
-              <a:gd name="connsiteX3" fmla="*/ 2050869 w 4572000"/>
-              <a:gd name="connsiteY3" fmla="*/ 0 h 18288"/>
-              <a:gd name="connsiteX4" fmla="*/ 2612571 w 4572000"/>
-              <a:gd name="connsiteY4" fmla="*/ 0 h 18288"/>
-              <a:gd name="connsiteX5" fmla="*/ 3357154 w 4572000"/>
-              <a:gd name="connsiteY5" fmla="*/ 0 h 18288"/>
-              <a:gd name="connsiteX6" fmla="*/ 4010297 w 4572000"/>
-              <a:gd name="connsiteY6" fmla="*/ 0 h 18288"/>
-              <a:gd name="connsiteX7" fmla="*/ 4572000 w 4572000"/>
-              <a:gd name="connsiteY7" fmla="*/ 0 h 18288"/>
-              <a:gd name="connsiteX8" fmla="*/ 4572000 w 4572000"/>
-              <a:gd name="connsiteY8" fmla="*/ 18288 h 18288"/>
-              <a:gd name="connsiteX9" fmla="*/ 3873137 w 4572000"/>
-              <a:gd name="connsiteY9" fmla="*/ 18288 h 18288"/>
-              <a:gd name="connsiteX10" fmla="*/ 3265714 w 4572000"/>
-              <a:gd name="connsiteY10" fmla="*/ 18288 h 18288"/>
-              <a:gd name="connsiteX11" fmla="*/ 2521131 w 4572000"/>
-              <a:gd name="connsiteY11" fmla="*/ 18288 h 18288"/>
-              <a:gd name="connsiteX12" fmla="*/ 1867989 w 4572000"/>
-              <a:gd name="connsiteY12" fmla="*/ 18288 h 18288"/>
-              <a:gd name="connsiteX13" fmla="*/ 1352006 w 4572000"/>
-              <a:gd name="connsiteY13" fmla="*/ 18288 h 18288"/>
-              <a:gd name="connsiteX14" fmla="*/ 836023 w 4572000"/>
-              <a:gd name="connsiteY14" fmla="*/ 18288 h 18288"/>
-              <a:gd name="connsiteX15" fmla="*/ 0 w 4572000"/>
-              <a:gd name="connsiteY15" fmla="*/ 18288 h 18288"/>
-              <a:gd name="connsiteX16" fmla="*/ 0 w 4572000"/>
-              <a:gd name="connsiteY16" fmla="*/ 0 h 18288"/>
+              <a:gd name="csX0" fmla="*/ 0 w 4572000"/>
+              <a:gd name="csY0" fmla="*/ 0 h 18288"/>
+              <a:gd name="csX1" fmla="*/ 744583 w 4572000"/>
+              <a:gd name="csY1" fmla="*/ 0 h 18288"/>
+              <a:gd name="csX2" fmla="*/ 1352006 w 4572000"/>
+              <a:gd name="csY2" fmla="*/ 0 h 18288"/>
+              <a:gd name="csX3" fmla="*/ 2050869 w 4572000"/>
+              <a:gd name="csY3" fmla="*/ 0 h 18288"/>
+              <a:gd name="csX4" fmla="*/ 2612571 w 4572000"/>
+              <a:gd name="csY4" fmla="*/ 0 h 18288"/>
+              <a:gd name="csX5" fmla="*/ 3357154 w 4572000"/>
+              <a:gd name="csY5" fmla="*/ 0 h 18288"/>
+              <a:gd name="csX6" fmla="*/ 4010297 w 4572000"/>
+              <a:gd name="csY6" fmla="*/ 0 h 18288"/>
+              <a:gd name="csX7" fmla="*/ 4572000 w 4572000"/>
+              <a:gd name="csY7" fmla="*/ 0 h 18288"/>
+              <a:gd name="csX8" fmla="*/ 4572000 w 4572000"/>
+              <a:gd name="csY8" fmla="*/ 18288 h 18288"/>
+              <a:gd name="csX9" fmla="*/ 3873137 w 4572000"/>
+              <a:gd name="csY9" fmla="*/ 18288 h 18288"/>
+              <a:gd name="csX10" fmla="*/ 3265714 w 4572000"/>
+              <a:gd name="csY10" fmla="*/ 18288 h 18288"/>
+              <a:gd name="csX11" fmla="*/ 2521131 w 4572000"/>
+              <a:gd name="csY11" fmla="*/ 18288 h 18288"/>
+              <a:gd name="csX12" fmla="*/ 1867989 w 4572000"/>
+              <a:gd name="csY12" fmla="*/ 18288 h 18288"/>
+              <a:gd name="csX13" fmla="*/ 1352006 w 4572000"/>
+              <a:gd name="csY13" fmla="*/ 18288 h 18288"/>
+              <a:gd name="csX14" fmla="*/ 836023 w 4572000"/>
+              <a:gd name="csY14" fmla="*/ 18288 h 18288"/>
+              <a:gd name="csX15" fmla="*/ 0 w 4572000"/>
+              <a:gd name="csY15" fmla="*/ 18288 h 18288"/>
+              <a:gd name="csX16" fmla="*/ 0 w 4572000"/>
+              <a:gd name="csY16" fmla="*/ 0 h 18288"/>
             </a:gdLst>
             <a:ahLst/>
             <a:cxnLst>
               <a:cxn ang="0">
-                <a:pos x="connsiteX0" y="connsiteY0"/>
-              </a:cxn>
-              <a:cxn ang="0">
-                <a:pos x="connsiteX1" y="connsiteY1"/>
-              </a:cxn>
-              <a:cxn ang="0">
-                <a:pos x="connsiteX2" y="connsiteY2"/>
-              </a:cxn>
-              <a:cxn ang="0">
-                <a:pos x="connsiteX3" y="connsiteY3"/>
-              </a:cxn>
-              <a:cxn ang="0">
-                <a:pos x="connsiteX4" y="connsiteY4"/>
-              </a:cxn>
-              <a:cxn ang="0">
-                <a:pos x="connsiteX5" y="connsiteY5"/>
-              </a:cxn>
-              <a:cxn ang="0">
-                <a:pos x="connsiteX6" y="connsiteY6"/>
-              </a:cxn>
-              <a:cxn ang="0">
-                <a:pos x="connsiteX7" y="connsiteY7"/>
-              </a:cxn>
-              <a:cxn ang="0">
-                <a:pos x="connsiteX8" y="connsiteY8"/>
-              </a:cxn>
-              <a:cxn ang="0">
-                <a:pos x="connsiteX9" y="connsiteY9"/>
-              </a:cxn>
-              <a:cxn ang="0">
-                <a:pos x="connsiteX10" y="connsiteY10"/>
-              </a:cxn>
-              <a:cxn ang="0">
-                <a:pos x="connsiteX11" y="connsiteY11"/>
-              </a:cxn>
-              <a:cxn ang="0">
-                <a:pos x="connsiteX12" y="connsiteY12"/>
-              </a:cxn>
-              <a:cxn ang="0">
-                <a:pos x="connsiteX13" y="connsiteY13"/>
-              </a:cxn>
-              <a:cxn ang="0">
-                <a:pos x="connsiteX14" y="connsiteY14"/>
-              </a:cxn>
-              <a:cxn ang="0">
-                <a:pos x="connsiteX15" y="connsiteY15"/>
-              </a:cxn>
-              <a:cxn ang="0">
-                <a:pos x="connsiteX16" y="connsiteY16"/>
+                <a:pos x="csX0" y="csY0"/>
+              </a:cxn>
+              <a:cxn ang="0">
+                <a:pos x="csX1" y="csY1"/>
+              </a:cxn>
+              <a:cxn ang="0">
+                <a:pos x="csX2" y="csY2"/>
+              </a:cxn>
+              <a:cxn ang="0">
+                <a:pos x="csX3" y="csY3"/>
+              </a:cxn>
+              <a:cxn ang="0">
+                <a:pos x="csX4" y="csY4"/>
+              </a:cxn>
+              <a:cxn ang="0">
+                <a:pos x="csX5" y="csY5"/>
+              </a:cxn>
+              <a:cxn ang="0">
+                <a:pos x="csX6" y="csY6"/>
+              </a:cxn>
+              <a:cxn ang="0">
+                <a:pos x="csX7" y="csY7"/>
+              </a:cxn>
+              <a:cxn ang="0">
+                <a:pos x="csX8" y="csY8"/>
+              </a:cxn>
+              <a:cxn ang="0">
+                <a:pos x="csX9" y="csY9"/>
+              </a:cxn>
+              <a:cxn ang="0">
+                <a:pos x="csX10" y="csY10"/>
+              </a:cxn>
+              <a:cxn ang="0">
+                <a:pos x="csX11" y="csY11"/>
+              </a:cxn>
+              <a:cxn ang="0">
+                <a:pos x="csX12" y="csY12"/>
+              </a:cxn>
+              <a:cxn ang="0">
+                <a:pos x="csX13" y="csY13"/>
+              </a:cxn>
+              <a:cxn ang="0">
+                <a:pos x="csX14" y="csY14"/>
+              </a:cxn>
+              <a:cxn ang="0">
+                <a:pos x="csX15" y="csY15"/>
+              </a:cxn>
+              <a:cxn ang="0">
+                <a:pos x="csX16" y="csY16"/>
               </a:cxn>
             </a:cxnLst>
             <a:rect l="l" t="t" r="r" b="b"/>
@@ -9289,68 +9289,68 @@
           <a:custGeom>
             <a:avLst/>
             <a:gdLst>
-              <a:gd name="connsiteX0" fmla="*/ 0 w 3255095"/>
-              <a:gd name="connsiteY0" fmla="*/ 0 h 18288"/>
-              <a:gd name="connsiteX1" fmla="*/ 618468 w 3255095"/>
-              <a:gd name="connsiteY1" fmla="*/ 0 h 18288"/>
-              <a:gd name="connsiteX2" fmla="*/ 1269487 w 3255095"/>
-              <a:gd name="connsiteY2" fmla="*/ 0 h 18288"/>
-              <a:gd name="connsiteX3" fmla="*/ 1953057 w 3255095"/>
-              <a:gd name="connsiteY3" fmla="*/ 0 h 18288"/>
-              <a:gd name="connsiteX4" fmla="*/ 2636627 w 3255095"/>
-              <a:gd name="connsiteY4" fmla="*/ 0 h 18288"/>
-              <a:gd name="connsiteX5" fmla="*/ 3255095 w 3255095"/>
-              <a:gd name="connsiteY5" fmla="*/ 0 h 18288"/>
-              <a:gd name="connsiteX6" fmla="*/ 3255095 w 3255095"/>
-              <a:gd name="connsiteY6" fmla="*/ 18288 h 18288"/>
-              <a:gd name="connsiteX7" fmla="*/ 2538974 w 3255095"/>
-              <a:gd name="connsiteY7" fmla="*/ 18288 h 18288"/>
-              <a:gd name="connsiteX8" fmla="*/ 1822853 w 3255095"/>
-              <a:gd name="connsiteY8" fmla="*/ 18288 h 18288"/>
-              <a:gd name="connsiteX9" fmla="*/ 1171834 w 3255095"/>
-              <a:gd name="connsiteY9" fmla="*/ 18288 h 18288"/>
-              <a:gd name="connsiteX10" fmla="*/ 0 w 3255095"/>
-              <a:gd name="connsiteY10" fmla="*/ 18288 h 18288"/>
-              <a:gd name="connsiteX11" fmla="*/ 0 w 3255095"/>
-              <a:gd name="connsiteY11" fmla="*/ 0 h 18288"/>
+              <a:gd name="csX0" fmla="*/ 0 w 3255095"/>
+              <a:gd name="csY0" fmla="*/ 0 h 18288"/>
+              <a:gd name="csX1" fmla="*/ 618468 w 3255095"/>
+              <a:gd name="csY1" fmla="*/ 0 h 18288"/>
+              <a:gd name="csX2" fmla="*/ 1269487 w 3255095"/>
+              <a:gd name="csY2" fmla="*/ 0 h 18288"/>
+              <a:gd name="csX3" fmla="*/ 1953057 w 3255095"/>
+              <a:gd name="csY3" fmla="*/ 0 h 18288"/>
+              <a:gd name="csX4" fmla="*/ 2636627 w 3255095"/>
+              <a:gd name="csY4" fmla="*/ 0 h 18288"/>
+              <a:gd name="csX5" fmla="*/ 3255095 w 3255095"/>
+              <a:gd name="csY5" fmla="*/ 0 h 18288"/>
+              <a:gd name="csX6" fmla="*/ 3255095 w 3255095"/>
+              <a:gd name="csY6" fmla="*/ 18288 h 18288"/>
+              <a:gd name="csX7" fmla="*/ 2538974 w 3255095"/>
+              <a:gd name="csY7" fmla="*/ 18288 h 18288"/>
+              <a:gd name="csX8" fmla="*/ 1822853 w 3255095"/>
+              <a:gd name="csY8" fmla="*/ 18288 h 18288"/>
+              <a:gd name="csX9" fmla="*/ 1171834 w 3255095"/>
+              <a:gd name="csY9" fmla="*/ 18288 h 18288"/>
+              <a:gd name="csX10" fmla="*/ 0 w 3255095"/>
+              <a:gd name="csY10" fmla="*/ 18288 h 18288"/>
+              <a:gd name="csX11" fmla="*/ 0 w 3255095"/>
+              <a:gd name="csY11" fmla="*/ 0 h 18288"/>
             </a:gdLst>
             <a:ahLst/>
             <a:cxnLst>
               <a:cxn ang="0">
-                <a:pos x="connsiteX0" y="connsiteY0"/>
-              </a:cxn>
-              <a:cxn ang="0">
-                <a:pos x="connsiteX1" y="connsiteY1"/>
-              </a:cxn>
-              <a:cxn ang="0">
-                <a:pos x="connsiteX2" y="connsiteY2"/>
-              </a:cxn>
-              <a:cxn ang="0">
-                <a:pos x="connsiteX3" y="connsiteY3"/>
-              </a:cxn>
-              <a:cxn ang="0">
-                <a:pos x="connsiteX4" y="connsiteY4"/>
-              </a:cxn>
-              <a:cxn ang="0">
-                <a:pos x="connsiteX5" y="connsiteY5"/>
-              </a:cxn>
-              <a:cxn ang="0">
-                <a:pos x="connsiteX6" y="connsiteY6"/>
-              </a:cxn>
-              <a:cxn ang="0">
-                <a:pos x="connsiteX7" y="connsiteY7"/>
-              </a:cxn>
-              <a:cxn ang="0">
-                <a:pos x="connsiteX8" y="connsiteY8"/>
-              </a:cxn>
-              <a:cxn ang="0">
-                <a:pos x="connsiteX9" y="connsiteY9"/>
-              </a:cxn>
-              <a:cxn ang="0">
-                <a:pos x="connsiteX10" y="connsiteY10"/>
-              </a:cxn>
-              <a:cxn ang="0">
-                <a:pos x="connsiteX11" y="connsiteY11"/>
+                <a:pos x="csX0" y="csY0"/>
+              </a:cxn>
+              <a:cxn ang="0">
+                <a:pos x="csX1" y="csY1"/>
+              </a:cxn>
+              <a:cxn ang="0">
+                <a:pos x="csX2" y="csY2"/>
+              </a:cxn>
+              <a:cxn ang="0">
+                <a:pos x="csX3" y="csY3"/>
+              </a:cxn>
+              <a:cxn ang="0">
+                <a:pos x="csX4" y="csY4"/>
+              </a:cxn>
+              <a:cxn ang="0">
+                <a:pos x="csX5" y="csY5"/>
+              </a:cxn>
+              <a:cxn ang="0">
+                <a:pos x="csX6" y="csY6"/>
+              </a:cxn>
+              <a:cxn ang="0">
+                <a:pos x="csX7" y="csY7"/>
+              </a:cxn>
+              <a:cxn ang="0">
+                <a:pos x="csX8" y="csY8"/>
+              </a:cxn>
+              <a:cxn ang="0">
+                <a:pos x="csX9" y="csY9"/>
+              </a:cxn>
+              <a:cxn ang="0">
+                <a:pos x="csX10" y="csY10"/>
+              </a:cxn>
+              <a:cxn ang="0">
+                <a:pos x="csX11" y="csY11"/>
               </a:cxn>
             </a:cxnLst>
             <a:rect l="l" t="t" r="r" b="b"/>
@@ -9735,103 +9735,103 @@
           <a:custGeom>
             <a:avLst/>
             <a:gdLst>
-              <a:gd name="connsiteX0" fmla="*/ 0 w 5410200"/>
-              <a:gd name="connsiteY0" fmla="*/ 0 h 18288"/>
-              <a:gd name="connsiteX1" fmla="*/ 568071 w 5410200"/>
-              <a:gd name="connsiteY1" fmla="*/ 0 h 18288"/>
-              <a:gd name="connsiteX2" fmla="*/ 1298448 w 5410200"/>
-              <a:gd name="connsiteY2" fmla="*/ 0 h 18288"/>
-              <a:gd name="connsiteX3" fmla="*/ 1920621 w 5410200"/>
-              <a:gd name="connsiteY3" fmla="*/ 0 h 18288"/>
-              <a:gd name="connsiteX4" fmla="*/ 2488692 w 5410200"/>
-              <a:gd name="connsiteY4" fmla="*/ 0 h 18288"/>
-              <a:gd name="connsiteX5" fmla="*/ 3219069 w 5410200"/>
-              <a:gd name="connsiteY5" fmla="*/ 0 h 18288"/>
-              <a:gd name="connsiteX6" fmla="*/ 3895344 w 5410200"/>
-              <a:gd name="connsiteY6" fmla="*/ 0 h 18288"/>
-              <a:gd name="connsiteX7" fmla="*/ 4571619 w 5410200"/>
-              <a:gd name="connsiteY7" fmla="*/ 0 h 18288"/>
-              <a:gd name="connsiteX8" fmla="*/ 5410200 w 5410200"/>
-              <a:gd name="connsiteY8" fmla="*/ 0 h 18288"/>
-              <a:gd name="connsiteX9" fmla="*/ 5410200 w 5410200"/>
-              <a:gd name="connsiteY9" fmla="*/ 18288 h 18288"/>
-              <a:gd name="connsiteX10" fmla="*/ 4842129 w 5410200"/>
-              <a:gd name="connsiteY10" fmla="*/ 18288 h 18288"/>
-              <a:gd name="connsiteX11" fmla="*/ 4328160 w 5410200"/>
-              <a:gd name="connsiteY11" fmla="*/ 18288 h 18288"/>
-              <a:gd name="connsiteX12" fmla="*/ 3597783 w 5410200"/>
-              <a:gd name="connsiteY12" fmla="*/ 18288 h 18288"/>
-              <a:gd name="connsiteX13" fmla="*/ 3029712 w 5410200"/>
-              <a:gd name="connsiteY13" fmla="*/ 18288 h 18288"/>
-              <a:gd name="connsiteX14" fmla="*/ 2299335 w 5410200"/>
-              <a:gd name="connsiteY14" fmla="*/ 18288 h 18288"/>
-              <a:gd name="connsiteX15" fmla="*/ 1514856 w 5410200"/>
-              <a:gd name="connsiteY15" fmla="*/ 18288 h 18288"/>
-              <a:gd name="connsiteX16" fmla="*/ 892683 w 5410200"/>
-              <a:gd name="connsiteY16" fmla="*/ 18288 h 18288"/>
-              <a:gd name="connsiteX17" fmla="*/ 0 w 5410200"/>
-              <a:gd name="connsiteY17" fmla="*/ 18288 h 18288"/>
-              <a:gd name="connsiteX18" fmla="*/ 0 w 5410200"/>
-              <a:gd name="connsiteY18" fmla="*/ 0 h 18288"/>
+              <a:gd name="csX0" fmla="*/ 0 w 5410200"/>
+              <a:gd name="csY0" fmla="*/ 0 h 18288"/>
+              <a:gd name="csX1" fmla="*/ 568071 w 5410200"/>
+              <a:gd name="csY1" fmla="*/ 0 h 18288"/>
+              <a:gd name="csX2" fmla="*/ 1298448 w 5410200"/>
+              <a:gd name="csY2" fmla="*/ 0 h 18288"/>
+              <a:gd name="csX3" fmla="*/ 1920621 w 5410200"/>
+              <a:gd name="csY3" fmla="*/ 0 h 18288"/>
+              <a:gd name="csX4" fmla="*/ 2488692 w 5410200"/>
+              <a:gd name="csY4" fmla="*/ 0 h 18288"/>
+              <a:gd name="csX5" fmla="*/ 3219069 w 5410200"/>
+              <a:gd name="csY5" fmla="*/ 0 h 18288"/>
+              <a:gd name="csX6" fmla="*/ 3895344 w 5410200"/>
+              <a:gd name="csY6" fmla="*/ 0 h 18288"/>
+              <a:gd name="csX7" fmla="*/ 4571619 w 5410200"/>
+              <a:gd name="csY7" fmla="*/ 0 h 18288"/>
+              <a:gd name="csX8" fmla="*/ 5410200 w 5410200"/>
+              <a:gd name="csY8" fmla="*/ 0 h 18288"/>
+              <a:gd name="csX9" fmla="*/ 5410200 w 5410200"/>
+              <a:gd name="csY9" fmla="*/ 18288 h 18288"/>
+              <a:gd name="csX10" fmla="*/ 4842129 w 5410200"/>
+              <a:gd name="csY10" fmla="*/ 18288 h 18288"/>
+              <a:gd name="csX11" fmla="*/ 4328160 w 5410200"/>
+              <a:gd name="csY11" fmla="*/ 18288 h 18288"/>
+              <a:gd name="csX12" fmla="*/ 3597783 w 5410200"/>
+              <a:gd name="csY12" fmla="*/ 18288 h 18288"/>
+              <a:gd name="csX13" fmla="*/ 3029712 w 5410200"/>
+              <a:gd name="csY13" fmla="*/ 18288 h 18288"/>
+              <a:gd name="csX14" fmla="*/ 2299335 w 5410200"/>
+              <a:gd name="csY14" fmla="*/ 18288 h 18288"/>
+              <a:gd name="csX15" fmla="*/ 1514856 w 5410200"/>
+              <a:gd name="csY15" fmla="*/ 18288 h 18288"/>
+              <a:gd name="csX16" fmla="*/ 892683 w 5410200"/>
+              <a:gd name="csY16" fmla="*/ 18288 h 18288"/>
+              <a:gd name="csX17" fmla="*/ 0 w 5410200"/>
+              <a:gd name="csY17" fmla="*/ 18288 h 18288"/>
+              <a:gd name="csX18" fmla="*/ 0 w 5410200"/>
+              <a:gd name="csY18" fmla="*/ 0 h 18288"/>
             </a:gdLst>
             <a:ahLst/>
             <a:cxnLst>
               <a:cxn ang="0">
-                <a:pos x="connsiteX0" y="connsiteY0"/>
-              </a:cxn>
-              <a:cxn ang="0">
-                <a:pos x="connsiteX1" y="connsiteY1"/>
-              </a:cxn>
-              <a:cxn ang="0">
-                <a:pos x="connsiteX2" y="connsiteY2"/>
-              </a:cxn>
-              <a:cxn ang="0">
-                <a:pos x="connsiteX3" y="connsiteY3"/>
-              </a:cxn>
-              <a:cxn ang="0">
-                <a:pos x="connsiteX4" y="connsiteY4"/>
-              </a:cxn>
-              <a:cxn ang="0">
-                <a:pos x="connsiteX5" y="connsiteY5"/>
-              </a:cxn>
-              <a:cxn ang="0">
-                <a:pos x="connsiteX6" y="connsiteY6"/>
-              </a:cxn>
-              <a:cxn ang="0">
-                <a:pos x="connsiteX7" y="connsiteY7"/>
-              </a:cxn>
-              <a:cxn ang="0">
-                <a:pos x="connsiteX8" y="connsiteY8"/>
-              </a:cxn>
-              <a:cxn ang="0">
-                <a:pos x="connsiteX9" y="connsiteY9"/>
-              </a:cxn>
-              <a:cxn ang="0">
-                <a:pos x="connsiteX10" y="connsiteY10"/>
-              </a:cxn>
-              <a:cxn ang="0">
-                <a:pos x="connsiteX11" y="connsiteY11"/>
-              </a:cxn>
-              <a:cxn ang="0">
-                <a:pos x="connsiteX12" y="connsiteY12"/>
-              </a:cxn>
-              <a:cxn ang="0">
-                <a:pos x="connsiteX13" y="connsiteY13"/>
-              </a:cxn>
-              <a:cxn ang="0">
-                <a:pos x="connsiteX14" y="connsiteY14"/>
-              </a:cxn>
-              <a:cxn ang="0">
-                <a:pos x="connsiteX15" y="connsiteY15"/>
-              </a:cxn>
-              <a:cxn ang="0">
-                <a:pos x="connsiteX16" y="connsiteY16"/>
-              </a:cxn>
-              <a:cxn ang="0">
-                <a:pos x="connsiteX17" y="connsiteY17"/>
-              </a:cxn>
-              <a:cxn ang="0">
-                <a:pos x="connsiteX18" y="connsiteY18"/>
+                <a:pos x="csX0" y="csY0"/>
+              </a:cxn>
+              <a:cxn ang="0">
+                <a:pos x="csX1" y="csY1"/>
+              </a:cxn>
+              <a:cxn ang="0">
+                <a:pos x="csX2" y="csY2"/>
+              </a:cxn>
+              <a:cxn ang="0">
+                <a:pos x="csX3" y="csY3"/>
+              </a:cxn>
+              <a:cxn ang="0">
+                <a:pos x="csX4" y="csY4"/>
+              </a:cxn>
+              <a:cxn ang="0">
+                <a:pos x="csX5" y="csY5"/>
+              </a:cxn>
+              <a:cxn ang="0">
+                <a:pos x="csX6" y="csY6"/>
+              </a:cxn>
+              <a:cxn ang="0">
+                <a:pos x="csX7" y="csY7"/>
+              </a:cxn>
+              <a:cxn ang="0">
+                <a:pos x="csX8" y="csY8"/>
+              </a:cxn>
+              <a:cxn ang="0">
+                <a:pos x="csX9" y="csY9"/>
+              </a:cxn>
+              <a:cxn ang="0">
+                <a:pos x="csX10" y="csY10"/>
+              </a:cxn>
+              <a:cxn ang="0">
+                <a:pos x="csX11" y="csY11"/>
+              </a:cxn>
+              <a:cxn ang="0">
+                <a:pos x="csX12" y="csY12"/>
+              </a:cxn>
+              <a:cxn ang="0">
+                <a:pos x="csX13" y="csY13"/>
+              </a:cxn>
+              <a:cxn ang="0">
+                <a:pos x="csX14" y="csY14"/>
+              </a:cxn>
+              <a:cxn ang="0">
+                <a:pos x="csX15" y="csY15"/>
+              </a:cxn>
+              <a:cxn ang="0">
+                <a:pos x="csX16" y="csY16"/>
+              </a:cxn>
+              <a:cxn ang="0">
+                <a:pos x="csX17" y="csY17"/>
+              </a:cxn>
+              <a:cxn ang="0">
+                <a:pos x="csX18" y="csY18"/>
               </a:cxn>
             </a:cxnLst>
             <a:rect l="l" t="t" r="r" b="b"/>
@@ -10388,68 +10388,68 @@
           <a:custGeom>
             <a:avLst/>
             <a:gdLst>
-              <a:gd name="connsiteX0" fmla="*/ 0 w 3255095"/>
-              <a:gd name="connsiteY0" fmla="*/ 0 h 18288"/>
-              <a:gd name="connsiteX1" fmla="*/ 618468 w 3255095"/>
-              <a:gd name="connsiteY1" fmla="*/ 0 h 18288"/>
-              <a:gd name="connsiteX2" fmla="*/ 1269487 w 3255095"/>
-              <a:gd name="connsiteY2" fmla="*/ 0 h 18288"/>
-              <a:gd name="connsiteX3" fmla="*/ 1953057 w 3255095"/>
-              <a:gd name="connsiteY3" fmla="*/ 0 h 18288"/>
-              <a:gd name="connsiteX4" fmla="*/ 2636627 w 3255095"/>
-              <a:gd name="connsiteY4" fmla="*/ 0 h 18288"/>
-              <a:gd name="connsiteX5" fmla="*/ 3255095 w 3255095"/>
-              <a:gd name="connsiteY5" fmla="*/ 0 h 18288"/>
-              <a:gd name="connsiteX6" fmla="*/ 3255095 w 3255095"/>
-              <a:gd name="connsiteY6" fmla="*/ 18288 h 18288"/>
-              <a:gd name="connsiteX7" fmla="*/ 2538974 w 3255095"/>
-              <a:gd name="connsiteY7" fmla="*/ 18288 h 18288"/>
-              <a:gd name="connsiteX8" fmla="*/ 1822853 w 3255095"/>
-              <a:gd name="connsiteY8" fmla="*/ 18288 h 18288"/>
-              <a:gd name="connsiteX9" fmla="*/ 1171834 w 3255095"/>
-              <a:gd name="connsiteY9" fmla="*/ 18288 h 18288"/>
-              <a:gd name="connsiteX10" fmla="*/ 0 w 3255095"/>
-              <a:gd name="connsiteY10" fmla="*/ 18288 h 18288"/>
-              <a:gd name="connsiteX11" fmla="*/ 0 w 3255095"/>
-              <a:gd name="connsiteY11" fmla="*/ 0 h 18288"/>
+              <a:gd name="csX0" fmla="*/ 0 w 3255095"/>
+              <a:gd name="csY0" fmla="*/ 0 h 18288"/>
+              <a:gd name="csX1" fmla="*/ 618468 w 3255095"/>
+              <a:gd name="csY1" fmla="*/ 0 h 18288"/>
+              <a:gd name="csX2" fmla="*/ 1269487 w 3255095"/>
+              <a:gd name="csY2" fmla="*/ 0 h 18288"/>
+              <a:gd name="csX3" fmla="*/ 1953057 w 3255095"/>
+              <a:gd name="csY3" fmla="*/ 0 h 18288"/>
+              <a:gd name="csX4" fmla="*/ 2636627 w 3255095"/>
+              <a:gd name="csY4" fmla="*/ 0 h 18288"/>
+              <a:gd name="csX5" fmla="*/ 3255095 w 3255095"/>
+              <a:gd name="csY5" fmla="*/ 0 h 18288"/>
+              <a:gd name="csX6" fmla="*/ 3255095 w 3255095"/>
+              <a:gd name="csY6" fmla="*/ 18288 h 18288"/>
+              <a:gd name="csX7" fmla="*/ 2538974 w 3255095"/>
+              <a:gd name="csY7" fmla="*/ 18288 h 18288"/>
+              <a:gd name="csX8" fmla="*/ 1822853 w 3255095"/>
+              <a:gd name="csY8" fmla="*/ 18288 h 18288"/>
+              <a:gd name="csX9" fmla="*/ 1171834 w 3255095"/>
+              <a:gd name="csY9" fmla="*/ 18288 h 18288"/>
+              <a:gd name="csX10" fmla="*/ 0 w 3255095"/>
+              <a:gd name="csY10" fmla="*/ 18288 h 18288"/>
+              <a:gd name="csX11" fmla="*/ 0 w 3255095"/>
+              <a:gd name="csY11" fmla="*/ 0 h 18288"/>
             </a:gdLst>
             <a:ahLst/>
             <a:cxnLst>
               <a:cxn ang="0">
-                <a:pos x="connsiteX0" y="connsiteY0"/>
-              </a:cxn>
-              <a:cxn ang="0">
-                <a:pos x="connsiteX1" y="connsiteY1"/>
-              </a:cxn>
-              <a:cxn ang="0">
-                <a:pos x="connsiteX2" y="connsiteY2"/>
-              </a:cxn>
-              <a:cxn ang="0">
-                <a:pos x="connsiteX3" y="connsiteY3"/>
-              </a:cxn>
-              <a:cxn ang="0">
-                <a:pos x="connsiteX4" y="connsiteY4"/>
-              </a:cxn>
-              <a:cxn ang="0">
-                <a:pos x="connsiteX5" y="connsiteY5"/>
-              </a:cxn>
-              <a:cxn ang="0">
-                <a:pos x="connsiteX6" y="connsiteY6"/>
-              </a:cxn>
-              <a:cxn ang="0">
-                <a:pos x="connsiteX7" y="connsiteY7"/>
-              </a:cxn>
-              <a:cxn ang="0">
-                <a:pos x="connsiteX8" y="connsiteY8"/>
-              </a:cxn>
-              <a:cxn ang="0">
-                <a:pos x="connsiteX9" y="connsiteY9"/>
-              </a:cxn>
-              <a:cxn ang="0">
-                <a:pos x="connsiteX10" y="connsiteY10"/>
-              </a:cxn>
-              <a:cxn ang="0">
-                <a:pos x="connsiteX11" y="connsiteY11"/>
+                <a:pos x="csX0" y="csY0"/>
+              </a:cxn>
+              <a:cxn ang="0">
+                <a:pos x="csX1" y="csY1"/>
+              </a:cxn>
+              <a:cxn ang="0">
+                <a:pos x="csX2" y="csY2"/>
+              </a:cxn>
+              <a:cxn ang="0">
+                <a:pos x="csX3" y="csY3"/>
+              </a:cxn>
+              <a:cxn ang="0">
+                <a:pos x="csX4" y="csY4"/>
+              </a:cxn>
+              <a:cxn ang="0">
+                <a:pos x="csX5" y="csY5"/>
+              </a:cxn>
+              <a:cxn ang="0">
+                <a:pos x="csX6" y="csY6"/>
+              </a:cxn>
+              <a:cxn ang="0">
+                <a:pos x="csX7" y="csY7"/>
+              </a:cxn>
+              <a:cxn ang="0">
+                <a:pos x="csX8" y="csY8"/>
+              </a:cxn>
+              <a:cxn ang="0">
+                <a:pos x="csX9" y="csY9"/>
+              </a:cxn>
+              <a:cxn ang="0">
+                <a:pos x="csX10" y="csY10"/>
+              </a:cxn>
+              <a:cxn ang="0">
+                <a:pos x="csX11" y="csY11"/>
               </a:cxn>
             </a:cxnLst>
             <a:rect l="l" t="t" r="r" b="b"/>
@@ -10838,73 +10838,73 @@
           <a:custGeom>
             <a:avLst/>
             <a:gdLst>
-              <a:gd name="connsiteX0" fmla="*/ 0 w 3291840"/>
-              <a:gd name="connsiteY0" fmla="*/ 0 h 18288"/>
-              <a:gd name="connsiteX1" fmla="*/ 658368 w 3291840"/>
-              <a:gd name="connsiteY1" fmla="*/ 0 h 18288"/>
-              <a:gd name="connsiteX2" fmla="*/ 1283818 w 3291840"/>
-              <a:gd name="connsiteY2" fmla="*/ 0 h 18288"/>
-              <a:gd name="connsiteX3" fmla="*/ 1909267 w 3291840"/>
-              <a:gd name="connsiteY3" fmla="*/ 0 h 18288"/>
-              <a:gd name="connsiteX4" fmla="*/ 2633472 w 3291840"/>
-              <a:gd name="connsiteY4" fmla="*/ 0 h 18288"/>
-              <a:gd name="connsiteX5" fmla="*/ 3291840 w 3291840"/>
-              <a:gd name="connsiteY5" fmla="*/ 0 h 18288"/>
-              <a:gd name="connsiteX6" fmla="*/ 3291840 w 3291840"/>
-              <a:gd name="connsiteY6" fmla="*/ 18288 h 18288"/>
-              <a:gd name="connsiteX7" fmla="*/ 2633472 w 3291840"/>
-              <a:gd name="connsiteY7" fmla="*/ 18288 h 18288"/>
-              <a:gd name="connsiteX8" fmla="*/ 2073859 w 3291840"/>
-              <a:gd name="connsiteY8" fmla="*/ 18288 h 18288"/>
-              <a:gd name="connsiteX9" fmla="*/ 1448410 w 3291840"/>
-              <a:gd name="connsiteY9" fmla="*/ 18288 h 18288"/>
-              <a:gd name="connsiteX10" fmla="*/ 822960 w 3291840"/>
-              <a:gd name="connsiteY10" fmla="*/ 18288 h 18288"/>
-              <a:gd name="connsiteX11" fmla="*/ 0 w 3291840"/>
-              <a:gd name="connsiteY11" fmla="*/ 18288 h 18288"/>
-              <a:gd name="connsiteX12" fmla="*/ 0 w 3291840"/>
-              <a:gd name="connsiteY12" fmla="*/ 0 h 18288"/>
+              <a:gd name="csX0" fmla="*/ 0 w 3291840"/>
+              <a:gd name="csY0" fmla="*/ 0 h 18288"/>
+              <a:gd name="csX1" fmla="*/ 658368 w 3291840"/>
+              <a:gd name="csY1" fmla="*/ 0 h 18288"/>
+              <a:gd name="csX2" fmla="*/ 1283818 w 3291840"/>
+              <a:gd name="csY2" fmla="*/ 0 h 18288"/>
+              <a:gd name="csX3" fmla="*/ 1909267 w 3291840"/>
+              <a:gd name="csY3" fmla="*/ 0 h 18288"/>
+              <a:gd name="csX4" fmla="*/ 2633472 w 3291840"/>
+              <a:gd name="csY4" fmla="*/ 0 h 18288"/>
+              <a:gd name="csX5" fmla="*/ 3291840 w 3291840"/>
+              <a:gd name="csY5" fmla="*/ 0 h 18288"/>
+              <a:gd name="csX6" fmla="*/ 3291840 w 3291840"/>
+              <a:gd name="csY6" fmla="*/ 18288 h 18288"/>
+              <a:gd name="csX7" fmla="*/ 2633472 w 3291840"/>
+              <a:gd name="csY7" fmla="*/ 18288 h 18288"/>
+              <a:gd name="csX8" fmla="*/ 2073859 w 3291840"/>
+              <a:gd name="csY8" fmla="*/ 18288 h 18288"/>
+              <a:gd name="csX9" fmla="*/ 1448410 w 3291840"/>
+              <a:gd name="csY9" fmla="*/ 18288 h 18288"/>
+              <a:gd name="csX10" fmla="*/ 822960 w 3291840"/>
+              <a:gd name="csY10" fmla="*/ 18288 h 18288"/>
+              <a:gd name="csX11" fmla="*/ 0 w 3291840"/>
+              <a:gd name="csY11" fmla="*/ 18288 h 18288"/>
+              <a:gd name="csX12" fmla="*/ 0 w 3291840"/>
+              <a:gd name="csY12" fmla="*/ 0 h 18288"/>
             </a:gdLst>
             <a:ahLst/>
             <a:cxnLst>
               <a:cxn ang="0">
-                <a:pos x="connsiteX0" y="connsiteY0"/>
-              </a:cxn>
-              <a:cxn ang="0">
-                <a:pos x="connsiteX1" y="connsiteY1"/>
-              </a:cxn>
-              <a:cxn ang="0">
-                <a:pos x="connsiteX2" y="connsiteY2"/>
-              </a:cxn>
-              <a:cxn ang="0">
-                <a:pos x="connsiteX3" y="connsiteY3"/>
-              </a:cxn>
-              <a:cxn ang="0">
-                <a:pos x="connsiteX4" y="connsiteY4"/>
-              </a:cxn>
-              <a:cxn ang="0">
-                <a:pos x="connsiteX5" y="connsiteY5"/>
-              </a:cxn>
-              <a:cxn ang="0">
-                <a:pos x="connsiteX6" y="connsiteY6"/>
-              </a:cxn>
-              <a:cxn ang="0">
-                <a:pos x="connsiteX7" y="connsiteY7"/>
-              </a:cxn>
-              <a:cxn ang="0">
-                <a:pos x="connsiteX8" y="connsiteY8"/>
-              </a:cxn>
-              <a:cxn ang="0">
-                <a:pos x="connsiteX9" y="connsiteY9"/>
-              </a:cxn>
-              <a:cxn ang="0">
-                <a:pos x="connsiteX10" y="connsiteY10"/>
-              </a:cxn>
-              <a:cxn ang="0">
-                <a:pos x="connsiteX11" y="connsiteY11"/>
-              </a:cxn>
-              <a:cxn ang="0">
-                <a:pos x="connsiteX12" y="connsiteY12"/>
+                <a:pos x="csX0" y="csY0"/>
+              </a:cxn>
+              <a:cxn ang="0">
+                <a:pos x="csX1" y="csY1"/>
+              </a:cxn>
+              <a:cxn ang="0">
+                <a:pos x="csX2" y="csY2"/>
+              </a:cxn>
+              <a:cxn ang="0">
+                <a:pos x="csX3" y="csY3"/>
+              </a:cxn>
+              <a:cxn ang="0">
+                <a:pos x="csX4" y="csY4"/>
+              </a:cxn>
+              <a:cxn ang="0">
+                <a:pos x="csX5" y="csY5"/>
+              </a:cxn>
+              <a:cxn ang="0">
+                <a:pos x="csX6" y="csY6"/>
+              </a:cxn>
+              <a:cxn ang="0">
+                <a:pos x="csX7" y="csY7"/>
+              </a:cxn>
+              <a:cxn ang="0">
+                <a:pos x="csX8" y="csY8"/>
+              </a:cxn>
+              <a:cxn ang="0">
+                <a:pos x="csX9" y="csY9"/>
+              </a:cxn>
+              <a:cxn ang="0">
+                <a:pos x="csX10" y="csY10"/>
+              </a:cxn>
+              <a:cxn ang="0">
+                <a:pos x="csX11" y="csY11"/>
+              </a:cxn>
+              <a:cxn ang="0">
+                <a:pos x="csX12" y="csY12"/>
               </a:cxn>
             </a:cxnLst>
             <a:rect l="l" t="t" r="r" b="b"/>
@@ -11327,73 +11327,73 @@
           <a:custGeom>
             <a:avLst/>
             <a:gdLst>
-              <a:gd name="connsiteX0" fmla="*/ 0 w 3291840"/>
-              <a:gd name="connsiteY0" fmla="*/ 0 h 18288"/>
-              <a:gd name="connsiteX1" fmla="*/ 658368 w 3291840"/>
-              <a:gd name="connsiteY1" fmla="*/ 0 h 18288"/>
-              <a:gd name="connsiteX2" fmla="*/ 1283818 w 3291840"/>
-              <a:gd name="connsiteY2" fmla="*/ 0 h 18288"/>
-              <a:gd name="connsiteX3" fmla="*/ 1909267 w 3291840"/>
-              <a:gd name="connsiteY3" fmla="*/ 0 h 18288"/>
-              <a:gd name="connsiteX4" fmla="*/ 2633472 w 3291840"/>
-              <a:gd name="connsiteY4" fmla="*/ 0 h 18288"/>
-              <a:gd name="connsiteX5" fmla="*/ 3291840 w 3291840"/>
-              <a:gd name="connsiteY5" fmla="*/ 0 h 18288"/>
-              <a:gd name="connsiteX6" fmla="*/ 3291840 w 3291840"/>
-              <a:gd name="connsiteY6" fmla="*/ 18288 h 18288"/>
-              <a:gd name="connsiteX7" fmla="*/ 2633472 w 3291840"/>
-              <a:gd name="connsiteY7" fmla="*/ 18288 h 18288"/>
-              <a:gd name="connsiteX8" fmla="*/ 2073859 w 3291840"/>
-              <a:gd name="connsiteY8" fmla="*/ 18288 h 18288"/>
-              <a:gd name="connsiteX9" fmla="*/ 1448410 w 3291840"/>
-              <a:gd name="connsiteY9" fmla="*/ 18288 h 18288"/>
-              <a:gd name="connsiteX10" fmla="*/ 822960 w 3291840"/>
-              <a:gd name="connsiteY10" fmla="*/ 18288 h 18288"/>
-              <a:gd name="connsiteX11" fmla="*/ 0 w 3291840"/>
-              <a:gd name="connsiteY11" fmla="*/ 18288 h 18288"/>
-              <a:gd name="connsiteX12" fmla="*/ 0 w 3291840"/>
-              <a:gd name="connsiteY12" fmla="*/ 0 h 18288"/>
+              <a:gd name="csX0" fmla="*/ 0 w 3291840"/>
+              <a:gd name="csY0" fmla="*/ 0 h 18288"/>
+              <a:gd name="csX1" fmla="*/ 658368 w 3291840"/>
+              <a:gd name="csY1" fmla="*/ 0 h 18288"/>
+              <a:gd name="csX2" fmla="*/ 1283818 w 3291840"/>
+              <a:gd name="csY2" fmla="*/ 0 h 18288"/>
+              <a:gd name="csX3" fmla="*/ 1909267 w 3291840"/>
+              <a:gd name="csY3" fmla="*/ 0 h 18288"/>
+              <a:gd name="csX4" fmla="*/ 2633472 w 3291840"/>
+              <a:gd name="csY4" fmla="*/ 0 h 18288"/>
+              <a:gd name="csX5" fmla="*/ 3291840 w 3291840"/>
+              <a:gd name="csY5" fmla="*/ 0 h 18288"/>
+              <a:gd name="csX6" fmla="*/ 3291840 w 3291840"/>
+              <a:gd name="csY6" fmla="*/ 18288 h 18288"/>
+              <a:gd name="csX7" fmla="*/ 2633472 w 3291840"/>
+              <a:gd name="csY7" fmla="*/ 18288 h 18288"/>
+              <a:gd name="csX8" fmla="*/ 2073859 w 3291840"/>
+              <a:gd name="csY8" fmla="*/ 18288 h 18288"/>
+              <a:gd name="csX9" fmla="*/ 1448410 w 3291840"/>
+              <a:gd name="csY9" fmla="*/ 18288 h 18288"/>
+              <a:gd name="csX10" fmla="*/ 822960 w 3291840"/>
+              <a:gd name="csY10" fmla="*/ 18288 h 18288"/>
+              <a:gd name="csX11" fmla="*/ 0 w 3291840"/>
+              <a:gd name="csY11" fmla="*/ 18288 h 18288"/>
+              <a:gd name="csX12" fmla="*/ 0 w 3291840"/>
+              <a:gd name="csY12" fmla="*/ 0 h 18288"/>
             </a:gdLst>
             <a:ahLst/>
             <a:cxnLst>
               <a:cxn ang="0">
-                <a:pos x="connsiteX0" y="connsiteY0"/>
-              </a:cxn>
-              <a:cxn ang="0">
-                <a:pos x="connsiteX1" y="connsiteY1"/>
-              </a:cxn>
-              <a:cxn ang="0">
-                <a:pos x="connsiteX2" y="connsiteY2"/>
-              </a:cxn>
-              <a:cxn ang="0">
-                <a:pos x="connsiteX3" y="connsiteY3"/>
-              </a:cxn>
-              <a:cxn ang="0">
-                <a:pos x="connsiteX4" y="connsiteY4"/>
-              </a:cxn>
-              <a:cxn ang="0">
-                <a:pos x="connsiteX5" y="connsiteY5"/>
-              </a:cxn>
-              <a:cxn ang="0">
-                <a:pos x="connsiteX6" y="connsiteY6"/>
-              </a:cxn>
-              <a:cxn ang="0">
-                <a:pos x="connsiteX7" y="connsiteY7"/>
-              </a:cxn>
-              <a:cxn ang="0">
-                <a:pos x="connsiteX8" y="connsiteY8"/>
-              </a:cxn>
-              <a:cxn ang="0">
-                <a:pos x="connsiteX9" y="connsiteY9"/>
-              </a:cxn>
-              <a:cxn ang="0">
-                <a:pos x="connsiteX10" y="connsiteY10"/>
-              </a:cxn>
-              <a:cxn ang="0">
-                <a:pos x="connsiteX11" y="connsiteY11"/>
-              </a:cxn>
-              <a:cxn ang="0">
-                <a:pos x="connsiteX12" y="connsiteY12"/>
+                <a:pos x="csX0" y="csY0"/>
+              </a:cxn>
+              <a:cxn ang="0">
+                <a:pos x="csX1" y="csY1"/>
+              </a:cxn>
+              <a:cxn ang="0">
+                <a:pos x="csX2" y="csY2"/>
+              </a:cxn>
+              <a:cxn ang="0">
+                <a:pos x="csX3" y="csY3"/>
+              </a:cxn>
+              <a:cxn ang="0">
+                <a:pos x="csX4" y="csY4"/>
+              </a:cxn>
+              <a:cxn ang="0">
+                <a:pos x="csX5" y="csY5"/>
+              </a:cxn>
+              <a:cxn ang="0">
+                <a:pos x="csX6" y="csY6"/>
+              </a:cxn>
+              <a:cxn ang="0">
+                <a:pos x="csX7" y="csY7"/>
+              </a:cxn>
+              <a:cxn ang="0">
+                <a:pos x="csX8" y="csY8"/>
+              </a:cxn>
+              <a:cxn ang="0">
+                <a:pos x="csX9" y="csY9"/>
+              </a:cxn>
+              <a:cxn ang="0">
+                <a:pos x="csX10" y="csY10"/>
+              </a:cxn>
+              <a:cxn ang="0">
+                <a:pos x="csX11" y="csY11"/>
+              </a:cxn>
+              <a:cxn ang="0">
+                <a:pos x="csX12" y="csY12"/>
               </a:cxn>
             </a:cxnLst>
             <a:rect l="l" t="t" r="r" b="b"/>
@@ -11825,103 +11825,103 @@
           <a:custGeom>
             <a:avLst/>
             <a:gdLst>
-              <a:gd name="connsiteX0" fmla="*/ 0 w 5410200"/>
-              <a:gd name="connsiteY0" fmla="*/ 0 h 18288"/>
-              <a:gd name="connsiteX1" fmla="*/ 568071 w 5410200"/>
-              <a:gd name="connsiteY1" fmla="*/ 0 h 18288"/>
-              <a:gd name="connsiteX2" fmla="*/ 1298448 w 5410200"/>
-              <a:gd name="connsiteY2" fmla="*/ 0 h 18288"/>
-              <a:gd name="connsiteX3" fmla="*/ 1920621 w 5410200"/>
-              <a:gd name="connsiteY3" fmla="*/ 0 h 18288"/>
-              <a:gd name="connsiteX4" fmla="*/ 2488692 w 5410200"/>
-              <a:gd name="connsiteY4" fmla="*/ 0 h 18288"/>
-              <a:gd name="connsiteX5" fmla="*/ 3219069 w 5410200"/>
-              <a:gd name="connsiteY5" fmla="*/ 0 h 18288"/>
-              <a:gd name="connsiteX6" fmla="*/ 3895344 w 5410200"/>
-              <a:gd name="connsiteY6" fmla="*/ 0 h 18288"/>
-              <a:gd name="connsiteX7" fmla="*/ 4571619 w 5410200"/>
-              <a:gd name="connsiteY7" fmla="*/ 0 h 18288"/>
-              <a:gd name="connsiteX8" fmla="*/ 5410200 w 5410200"/>
-              <a:gd name="connsiteY8" fmla="*/ 0 h 18288"/>
-              <a:gd name="connsiteX9" fmla="*/ 5410200 w 5410200"/>
-              <a:gd name="connsiteY9" fmla="*/ 18288 h 18288"/>
-              <a:gd name="connsiteX10" fmla="*/ 4842129 w 5410200"/>
-              <a:gd name="connsiteY10" fmla="*/ 18288 h 18288"/>
-              <a:gd name="connsiteX11" fmla="*/ 4328160 w 5410200"/>
-              <a:gd name="connsiteY11" fmla="*/ 18288 h 18288"/>
-              <a:gd name="connsiteX12" fmla="*/ 3597783 w 5410200"/>
-              <a:gd name="connsiteY12" fmla="*/ 18288 h 18288"/>
-              <a:gd name="connsiteX13" fmla="*/ 3029712 w 5410200"/>
-              <a:gd name="connsiteY13" fmla="*/ 18288 h 18288"/>
-              <a:gd name="connsiteX14" fmla="*/ 2299335 w 5410200"/>
-              <a:gd name="connsiteY14" fmla="*/ 18288 h 18288"/>
-              <a:gd name="connsiteX15" fmla="*/ 1514856 w 5410200"/>
-              <a:gd name="connsiteY15" fmla="*/ 18288 h 18288"/>
-              <a:gd name="connsiteX16" fmla="*/ 892683 w 5410200"/>
-              <a:gd name="connsiteY16" fmla="*/ 18288 h 18288"/>
-              <a:gd name="connsiteX17" fmla="*/ 0 w 5410200"/>
-              <a:gd name="connsiteY17" fmla="*/ 18288 h 18288"/>
-              <a:gd name="connsiteX18" fmla="*/ 0 w 5410200"/>
-              <a:gd name="connsiteY18" fmla="*/ 0 h 18288"/>
+              <a:gd name="csX0" fmla="*/ 0 w 5410200"/>
+              <a:gd name="csY0" fmla="*/ 0 h 18288"/>
+              <a:gd name="csX1" fmla="*/ 568071 w 5410200"/>
+              <a:gd name="csY1" fmla="*/ 0 h 18288"/>
+              <a:gd name="csX2" fmla="*/ 1298448 w 5410200"/>
+              <a:gd name="csY2" fmla="*/ 0 h 18288"/>
+              <a:gd name="csX3" fmla="*/ 1920621 w 5410200"/>
+              <a:gd name="csY3" fmla="*/ 0 h 18288"/>
+              <a:gd name="csX4" fmla="*/ 2488692 w 5410200"/>
+              <a:gd name="csY4" fmla="*/ 0 h 18288"/>
+              <a:gd name="csX5" fmla="*/ 3219069 w 5410200"/>
+              <a:gd name="csY5" fmla="*/ 0 h 18288"/>
+              <a:gd name="csX6" fmla="*/ 3895344 w 5410200"/>
+              <a:gd name="csY6" fmla="*/ 0 h 18288"/>
+              <a:gd name="csX7" fmla="*/ 4571619 w 5410200"/>
+              <a:gd name="csY7" fmla="*/ 0 h 18288"/>
+              <a:gd name="csX8" fmla="*/ 5410200 w 5410200"/>
+              <a:gd name="csY8" fmla="*/ 0 h 18288"/>
+              <a:gd name="csX9" fmla="*/ 5410200 w 5410200"/>
+              <a:gd name="csY9" fmla="*/ 18288 h 18288"/>
+              <a:gd name="csX10" fmla="*/ 4842129 w 5410200"/>
+              <a:gd name="csY10" fmla="*/ 18288 h 18288"/>
+              <a:gd name="csX11" fmla="*/ 4328160 w 5410200"/>
+              <a:gd name="csY11" fmla="*/ 18288 h 18288"/>
+              <a:gd name="csX12" fmla="*/ 3597783 w 5410200"/>
+              <a:gd name="csY12" fmla="*/ 18288 h 18288"/>
+              <a:gd name="csX13" fmla="*/ 3029712 w 5410200"/>
+              <a:gd name="csY13" fmla="*/ 18288 h 18288"/>
+              <a:gd name="csX14" fmla="*/ 2299335 w 5410200"/>
+              <a:gd name="csY14" fmla="*/ 18288 h 18288"/>
+              <a:gd name="csX15" fmla="*/ 1514856 w 5410200"/>
+              <a:gd name="csY15" fmla="*/ 18288 h 18288"/>
+              <a:gd name="csX16" fmla="*/ 892683 w 5410200"/>
+              <a:gd name="csY16" fmla="*/ 18288 h 18288"/>
+              <a:gd name="csX17" fmla="*/ 0 w 5410200"/>
+              <a:gd name="csY17" fmla="*/ 18288 h 18288"/>
+              <a:gd name="csX18" fmla="*/ 0 w 5410200"/>
+              <a:gd name="csY18" fmla="*/ 0 h 18288"/>
             </a:gdLst>
             <a:ahLst/>
             <a:cxnLst>
               <a:cxn ang="0">
-                <a:pos x="connsiteX0" y="connsiteY0"/>
-              </a:cxn>
-              <a:cxn ang="0">
-                <a:pos x="connsiteX1" y="connsiteY1"/>
-              </a:cxn>
-              <a:cxn ang="0">
-                <a:pos x="connsiteX2" y="connsiteY2"/>
-              </a:cxn>
-              <a:cxn ang="0">
-                <a:pos x="connsiteX3" y="connsiteY3"/>
-              </a:cxn>
-              <a:cxn ang="0">
-                <a:pos x="connsiteX4" y="connsiteY4"/>
-              </a:cxn>
-              <a:cxn ang="0">
-                <a:pos x="connsiteX5" y="connsiteY5"/>
-              </a:cxn>
-              <a:cxn ang="0">
-                <a:pos x="connsiteX6" y="connsiteY6"/>
-              </a:cxn>
-              <a:cxn ang="0">
-                <a:pos x="connsiteX7" y="connsiteY7"/>
-              </a:cxn>
-              <a:cxn ang="0">
-                <a:pos x="connsiteX8" y="connsiteY8"/>
-              </a:cxn>
-              <a:cxn ang="0">
-                <a:pos x="connsiteX9" y="connsiteY9"/>
-              </a:cxn>
-              <a:cxn ang="0">
-                <a:pos x="connsiteX10" y="connsiteY10"/>
-              </a:cxn>
-              <a:cxn ang="0">
-                <a:pos x="connsiteX11" y="connsiteY11"/>
-              </a:cxn>
-              <a:cxn ang="0">
-                <a:pos x="connsiteX12" y="connsiteY12"/>
-              </a:cxn>
-              <a:cxn ang="0">
-                <a:pos x="connsiteX13" y="connsiteY13"/>
-              </a:cxn>
-              <a:cxn ang="0">
-                <a:pos x="connsiteX14" y="connsiteY14"/>
-              </a:cxn>
-              <a:cxn ang="0">
-                <a:pos x="connsiteX15" y="connsiteY15"/>
-              </a:cxn>
-              <a:cxn ang="0">
-                <a:pos x="connsiteX16" y="connsiteY16"/>
-              </a:cxn>
-              <a:cxn ang="0">
-                <a:pos x="connsiteX17" y="connsiteY17"/>
-              </a:cxn>
-              <a:cxn ang="0">
-                <a:pos x="connsiteX18" y="connsiteY18"/>
+                <a:pos x="csX0" y="csY0"/>
+              </a:cxn>
+              <a:cxn ang="0">
+                <a:pos x="csX1" y="csY1"/>
+              </a:cxn>
+              <a:cxn ang="0">
+                <a:pos x="csX2" y="csY2"/>
+              </a:cxn>
+              <a:cxn ang="0">
+                <a:pos x="csX3" y="csY3"/>
+              </a:cxn>
+              <a:cxn ang="0">
+                <a:pos x="csX4" y="csY4"/>
+              </a:cxn>
+              <a:cxn ang="0">
+                <a:pos x="csX5" y="csY5"/>
+              </a:cxn>
+              <a:cxn ang="0">
+                <a:pos x="csX6" y="csY6"/>
+              </a:cxn>
+              <a:cxn ang="0">
+                <a:pos x="csX7" y="csY7"/>
+              </a:cxn>
+              <a:cxn ang="0">
+                <a:pos x="csX8" y="csY8"/>
+              </a:cxn>
+              <a:cxn ang="0">
+                <a:pos x="csX9" y="csY9"/>
+              </a:cxn>
+              <a:cxn ang="0">
+                <a:pos x="csX10" y="csY10"/>
+              </a:cxn>
+              <a:cxn ang="0">
+                <a:pos x="csX11" y="csY11"/>
+              </a:cxn>
+              <a:cxn ang="0">
+                <a:pos x="csX12" y="csY12"/>
+              </a:cxn>
+              <a:cxn ang="0">
+                <a:pos x="csX13" y="csY13"/>
+              </a:cxn>
+              <a:cxn ang="0">
+                <a:pos x="csX14" y="csY14"/>
+              </a:cxn>
+              <a:cxn ang="0">
+                <a:pos x="csX15" y="csY15"/>
+              </a:cxn>
+              <a:cxn ang="0">
+                <a:pos x="csX16" y="csY16"/>
+              </a:cxn>
+              <a:cxn ang="0">
+                <a:pos x="csX17" y="csY17"/>
+              </a:cxn>
+              <a:cxn ang="0">
+                <a:pos x="csX18" y="csY18"/>
               </a:cxn>
             </a:cxnLst>
             <a:rect l="l" t="t" r="r" b="b"/>
@@ -12946,93 +12946,93 @@
           <a:custGeom>
             <a:avLst/>
             <a:gdLst>
-              <a:gd name="connsiteX0" fmla="*/ 0 w 4243589"/>
-              <a:gd name="connsiteY0" fmla="*/ 0 h 18288"/>
-              <a:gd name="connsiteX1" fmla="*/ 563791 w 4243589"/>
-              <a:gd name="connsiteY1" fmla="*/ 0 h 18288"/>
-              <a:gd name="connsiteX2" fmla="*/ 1042710 w 4243589"/>
-              <a:gd name="connsiteY2" fmla="*/ 0 h 18288"/>
-              <a:gd name="connsiteX3" fmla="*/ 1564066 w 4243589"/>
-              <a:gd name="connsiteY3" fmla="*/ 0 h 18288"/>
-              <a:gd name="connsiteX4" fmla="*/ 2212729 w 4243589"/>
-              <a:gd name="connsiteY4" fmla="*/ 0 h 18288"/>
-              <a:gd name="connsiteX5" fmla="*/ 2776520 w 4243589"/>
-              <a:gd name="connsiteY5" fmla="*/ 0 h 18288"/>
-              <a:gd name="connsiteX6" fmla="*/ 3297875 w 4243589"/>
-              <a:gd name="connsiteY6" fmla="*/ 0 h 18288"/>
-              <a:gd name="connsiteX7" fmla="*/ 4243589 w 4243589"/>
-              <a:gd name="connsiteY7" fmla="*/ 0 h 18288"/>
-              <a:gd name="connsiteX8" fmla="*/ 4243589 w 4243589"/>
-              <a:gd name="connsiteY8" fmla="*/ 18288 h 18288"/>
-              <a:gd name="connsiteX9" fmla="*/ 3637362 w 4243589"/>
-              <a:gd name="connsiteY9" fmla="*/ 18288 h 18288"/>
-              <a:gd name="connsiteX10" fmla="*/ 3116007 w 4243589"/>
-              <a:gd name="connsiteY10" fmla="*/ 18288 h 18288"/>
-              <a:gd name="connsiteX11" fmla="*/ 2424908 w 4243589"/>
-              <a:gd name="connsiteY11" fmla="*/ 18288 h 18288"/>
-              <a:gd name="connsiteX12" fmla="*/ 1861117 w 4243589"/>
-              <a:gd name="connsiteY12" fmla="*/ 18288 h 18288"/>
-              <a:gd name="connsiteX13" fmla="*/ 1382198 w 4243589"/>
-              <a:gd name="connsiteY13" fmla="*/ 18288 h 18288"/>
-              <a:gd name="connsiteX14" fmla="*/ 733535 w 4243589"/>
-              <a:gd name="connsiteY14" fmla="*/ 18288 h 18288"/>
-              <a:gd name="connsiteX15" fmla="*/ 0 w 4243589"/>
-              <a:gd name="connsiteY15" fmla="*/ 18288 h 18288"/>
-              <a:gd name="connsiteX16" fmla="*/ 0 w 4243589"/>
-              <a:gd name="connsiteY16" fmla="*/ 0 h 18288"/>
+              <a:gd name="csX0" fmla="*/ 0 w 4243589"/>
+              <a:gd name="csY0" fmla="*/ 0 h 18288"/>
+              <a:gd name="csX1" fmla="*/ 563791 w 4243589"/>
+              <a:gd name="csY1" fmla="*/ 0 h 18288"/>
+              <a:gd name="csX2" fmla="*/ 1042710 w 4243589"/>
+              <a:gd name="csY2" fmla="*/ 0 h 18288"/>
+              <a:gd name="csX3" fmla="*/ 1564066 w 4243589"/>
+              <a:gd name="csY3" fmla="*/ 0 h 18288"/>
+              <a:gd name="csX4" fmla="*/ 2212729 w 4243589"/>
+              <a:gd name="csY4" fmla="*/ 0 h 18288"/>
+              <a:gd name="csX5" fmla="*/ 2776520 w 4243589"/>
+              <a:gd name="csY5" fmla="*/ 0 h 18288"/>
+              <a:gd name="csX6" fmla="*/ 3297875 w 4243589"/>
+              <a:gd name="csY6" fmla="*/ 0 h 18288"/>
+              <a:gd name="csX7" fmla="*/ 4243589 w 4243589"/>
+              <a:gd name="csY7" fmla="*/ 0 h 18288"/>
+              <a:gd name="csX8" fmla="*/ 4243589 w 4243589"/>
+              <a:gd name="csY8" fmla="*/ 18288 h 18288"/>
+              <a:gd name="csX9" fmla="*/ 3637362 w 4243589"/>
+              <a:gd name="csY9" fmla="*/ 18288 h 18288"/>
+              <a:gd name="csX10" fmla="*/ 3116007 w 4243589"/>
+              <a:gd name="csY10" fmla="*/ 18288 h 18288"/>
+              <a:gd name="csX11" fmla="*/ 2424908 w 4243589"/>
+              <a:gd name="csY11" fmla="*/ 18288 h 18288"/>
+              <a:gd name="csX12" fmla="*/ 1861117 w 4243589"/>
+              <a:gd name="csY12" fmla="*/ 18288 h 18288"/>
+              <a:gd name="csX13" fmla="*/ 1382198 w 4243589"/>
+              <a:gd name="csY13" fmla="*/ 18288 h 18288"/>
+              <a:gd name="csX14" fmla="*/ 733535 w 4243589"/>
+              <a:gd name="csY14" fmla="*/ 18288 h 18288"/>
+              <a:gd name="csX15" fmla="*/ 0 w 4243589"/>
+              <a:gd name="csY15" fmla="*/ 18288 h 18288"/>
+              <a:gd name="csX16" fmla="*/ 0 w 4243589"/>
+              <a:gd name="csY16" fmla="*/ 0 h 18288"/>
             </a:gdLst>
             <a:ahLst/>
             <a:cxnLst>
               <a:cxn ang="0">
-                <a:pos x="connsiteX0" y="connsiteY0"/>
-              </a:cxn>
-              <a:cxn ang="0">
-                <a:pos x="connsiteX1" y="connsiteY1"/>
-              </a:cxn>
-              <a:cxn ang="0">
-                <a:pos x="connsiteX2" y="connsiteY2"/>
-              </a:cxn>
-              <a:cxn ang="0">
-                <a:pos x="connsiteX3" y="connsiteY3"/>
-              </a:cxn>
-              <a:cxn ang="0">
-                <a:pos x="connsiteX4" y="connsiteY4"/>
-              </a:cxn>
-              <a:cxn ang="0">
-                <a:pos x="connsiteX5" y="connsiteY5"/>
-              </a:cxn>
-              <a:cxn ang="0">
-                <a:pos x="connsiteX6" y="connsiteY6"/>
-              </a:cxn>
-              <a:cxn ang="0">
-                <a:pos x="connsiteX7" y="connsiteY7"/>
-              </a:cxn>
-              <a:cxn ang="0">
-                <a:pos x="connsiteX8" y="connsiteY8"/>
-              </a:cxn>
-              <a:cxn ang="0">
-                <a:pos x="connsiteX9" y="connsiteY9"/>
-              </a:cxn>
-              <a:cxn ang="0">
-                <a:pos x="connsiteX10" y="connsiteY10"/>
-              </a:cxn>
-              <a:cxn ang="0">
-                <a:pos x="connsiteX11" y="connsiteY11"/>
-              </a:cxn>
-              <a:cxn ang="0">
-                <a:pos x="connsiteX12" y="connsiteY12"/>
-              </a:cxn>
-              <a:cxn ang="0">
-                <a:pos x="connsiteX13" y="connsiteY13"/>
-              </a:cxn>
-              <a:cxn ang="0">
-                <a:pos x="connsiteX14" y="connsiteY14"/>
-              </a:cxn>
-              <a:cxn ang="0">
-                <a:pos x="connsiteX15" y="connsiteY15"/>
-              </a:cxn>
-              <a:cxn ang="0">
-                <a:pos x="connsiteX16" y="connsiteY16"/>
+                <a:pos x="csX0" y="csY0"/>
+              </a:cxn>
+              <a:cxn ang="0">
+                <a:pos x="csX1" y="csY1"/>
+              </a:cxn>
+              <a:cxn ang="0">
+                <a:pos x="csX2" y="csY2"/>
+              </a:cxn>
+              <a:cxn ang="0">
+                <a:pos x="csX3" y="csY3"/>
+              </a:cxn>
+              <a:cxn ang="0">
+                <a:pos x="csX4" y="csY4"/>
+              </a:cxn>
+              <a:cxn ang="0">
+                <a:pos x="csX5" y="csY5"/>
+              </a:cxn>
+              <a:cxn ang="0">
+                <a:pos x="csX6" y="csY6"/>
+              </a:cxn>
+              <a:cxn ang="0">
+                <a:pos x="csX7" y="csY7"/>
+              </a:cxn>
+              <a:cxn ang="0">
+                <a:pos x="csX8" y="csY8"/>
+              </a:cxn>
+              <a:cxn ang="0">
+                <a:pos x="csX9" y="csY9"/>
+              </a:cxn>
+              <a:cxn ang="0">
+                <a:pos x="csX10" y="csY10"/>
+              </a:cxn>
+              <a:cxn ang="0">
+                <a:pos x="csX11" y="csY11"/>
+              </a:cxn>
+              <a:cxn ang="0">
+                <a:pos x="csX12" y="csY12"/>
+              </a:cxn>
+              <a:cxn ang="0">
+                <a:pos x="csX13" y="csY13"/>
+              </a:cxn>
+              <a:cxn ang="0">
+                <a:pos x="csX14" y="csY14"/>
+              </a:cxn>
+              <a:cxn ang="0">
+                <a:pos x="csX15" y="csY15"/>
+              </a:cxn>
+              <a:cxn ang="0">
+                <a:pos x="csX16" y="csY16"/>
               </a:cxn>
             </a:cxnLst>
             <a:rect l="l" t="t" r="r" b="b"/>
@@ -13501,93 +13501,93 @@
           <a:custGeom>
             <a:avLst/>
             <a:gdLst>
-              <a:gd name="connsiteX0" fmla="*/ 0 w 4243589"/>
-              <a:gd name="connsiteY0" fmla="*/ 0 h 27432"/>
-              <a:gd name="connsiteX1" fmla="*/ 563791 w 4243589"/>
-              <a:gd name="connsiteY1" fmla="*/ 0 h 27432"/>
-              <a:gd name="connsiteX2" fmla="*/ 1042710 w 4243589"/>
-              <a:gd name="connsiteY2" fmla="*/ 0 h 27432"/>
-              <a:gd name="connsiteX3" fmla="*/ 1564066 w 4243589"/>
-              <a:gd name="connsiteY3" fmla="*/ 0 h 27432"/>
-              <a:gd name="connsiteX4" fmla="*/ 2212729 w 4243589"/>
-              <a:gd name="connsiteY4" fmla="*/ 0 h 27432"/>
-              <a:gd name="connsiteX5" fmla="*/ 2776520 w 4243589"/>
-              <a:gd name="connsiteY5" fmla="*/ 0 h 27432"/>
-              <a:gd name="connsiteX6" fmla="*/ 3297875 w 4243589"/>
-              <a:gd name="connsiteY6" fmla="*/ 0 h 27432"/>
-              <a:gd name="connsiteX7" fmla="*/ 4243589 w 4243589"/>
-              <a:gd name="connsiteY7" fmla="*/ 0 h 27432"/>
-              <a:gd name="connsiteX8" fmla="*/ 4243589 w 4243589"/>
-              <a:gd name="connsiteY8" fmla="*/ 27432 h 27432"/>
-              <a:gd name="connsiteX9" fmla="*/ 3637362 w 4243589"/>
-              <a:gd name="connsiteY9" fmla="*/ 27432 h 27432"/>
-              <a:gd name="connsiteX10" fmla="*/ 3116007 w 4243589"/>
-              <a:gd name="connsiteY10" fmla="*/ 27432 h 27432"/>
-              <a:gd name="connsiteX11" fmla="*/ 2424908 w 4243589"/>
-              <a:gd name="connsiteY11" fmla="*/ 27432 h 27432"/>
-              <a:gd name="connsiteX12" fmla="*/ 1861117 w 4243589"/>
-              <a:gd name="connsiteY12" fmla="*/ 27432 h 27432"/>
-              <a:gd name="connsiteX13" fmla="*/ 1382198 w 4243589"/>
-              <a:gd name="connsiteY13" fmla="*/ 27432 h 27432"/>
-              <a:gd name="connsiteX14" fmla="*/ 733535 w 4243589"/>
-              <a:gd name="connsiteY14" fmla="*/ 27432 h 27432"/>
-              <a:gd name="connsiteX15" fmla="*/ 0 w 4243589"/>
-              <a:gd name="connsiteY15" fmla="*/ 27432 h 27432"/>
-              <a:gd name="connsiteX16" fmla="*/ 0 w 4243589"/>
-              <a:gd name="connsiteY16" fmla="*/ 0 h 27432"/>
+              <a:gd name="csX0" fmla="*/ 0 w 4243589"/>
+              <a:gd name="csY0" fmla="*/ 0 h 27432"/>
+              <a:gd name="csX1" fmla="*/ 563791 w 4243589"/>
+              <a:gd name="csY1" fmla="*/ 0 h 27432"/>
+              <a:gd name="csX2" fmla="*/ 1042710 w 4243589"/>
+              <a:gd name="csY2" fmla="*/ 0 h 27432"/>
+              <a:gd name="csX3" fmla="*/ 1564066 w 4243589"/>
+              <a:gd name="csY3" fmla="*/ 0 h 27432"/>
+              <a:gd name="csX4" fmla="*/ 2212729 w 4243589"/>
+              <a:gd name="csY4" fmla="*/ 0 h 27432"/>
+              <a:gd name="csX5" fmla="*/ 2776520 w 4243589"/>
+              <a:gd name="csY5" fmla="*/ 0 h 27432"/>
+              <a:gd name="csX6" fmla="*/ 3297875 w 4243589"/>
+              <a:gd name="csY6" fmla="*/ 0 h 27432"/>
+              <a:gd name="csX7" fmla="*/ 4243589 w 4243589"/>
+              <a:gd name="csY7" fmla="*/ 0 h 27432"/>
+              <a:gd name="csX8" fmla="*/ 4243589 w 4243589"/>
+              <a:gd name="csY8" fmla="*/ 27432 h 27432"/>
+              <a:gd name="csX9" fmla="*/ 3637362 w 4243589"/>
+              <a:gd name="csY9" fmla="*/ 27432 h 27432"/>
+              <a:gd name="csX10" fmla="*/ 3116007 w 4243589"/>
+              <a:gd name="csY10" fmla="*/ 27432 h 27432"/>
+              <a:gd name="csX11" fmla="*/ 2424908 w 4243589"/>
+              <a:gd name="csY11" fmla="*/ 27432 h 27432"/>
+              <a:gd name="csX12" fmla="*/ 1861117 w 4243589"/>
+              <a:gd name="csY12" fmla="*/ 27432 h 27432"/>
+              <a:gd name="csX13" fmla="*/ 1382198 w 4243589"/>
+              <a:gd name="csY13" fmla="*/ 27432 h 27432"/>
+              <a:gd name="csX14" fmla="*/ 733535 w 4243589"/>
+              <a:gd name="csY14" fmla="*/ 27432 h 27432"/>
+              <a:gd name="csX15" fmla="*/ 0 w 4243589"/>
+              <a:gd name="csY15" fmla="*/ 27432 h 27432"/>
+              <a:gd name="csX16" fmla="*/ 0 w 4243589"/>
+              <a:gd name="csY16" fmla="*/ 0 h 27432"/>
             </a:gdLst>
             <a:ahLst/>
             <a:cxnLst>
               <a:cxn ang="0">
-                <a:pos x="connsiteX0" y="connsiteY0"/>
-              </a:cxn>
-              <a:cxn ang="0">
-                <a:pos x="connsiteX1" y="connsiteY1"/>
-              </a:cxn>
-              <a:cxn ang="0">
-                <a:pos x="connsiteX2" y="connsiteY2"/>
-              </a:cxn>
-              <a:cxn ang="0">
-                <a:pos x="connsiteX3" y="connsiteY3"/>
-              </a:cxn>
-              <a:cxn ang="0">
-                <a:pos x="connsiteX4" y="connsiteY4"/>
-              </a:cxn>
-              <a:cxn ang="0">
-                <a:pos x="connsiteX5" y="connsiteY5"/>
-              </a:cxn>
-              <a:cxn ang="0">
-                <a:pos x="connsiteX6" y="connsiteY6"/>
-              </a:cxn>
-              <a:cxn ang="0">
-                <a:pos x="connsiteX7" y="connsiteY7"/>
-              </a:cxn>
-              <a:cxn ang="0">
-                <a:pos x="connsiteX8" y="connsiteY8"/>
-              </a:cxn>
-              <a:cxn ang="0">
-                <a:pos x="connsiteX9" y="connsiteY9"/>
-              </a:cxn>
-              <a:cxn ang="0">
-                <a:pos x="connsiteX10" y="connsiteY10"/>
-              </a:cxn>
-              <a:cxn ang="0">
-                <a:pos x="connsiteX11" y="connsiteY11"/>
-              </a:cxn>
-              <a:cxn ang="0">
-                <a:pos x="connsiteX12" y="connsiteY12"/>
-              </a:cxn>
-              <a:cxn ang="0">
-                <a:pos x="connsiteX13" y="connsiteY13"/>
-              </a:cxn>
-              <a:cxn ang="0">
-                <a:pos x="connsiteX14" y="connsiteY14"/>
-              </a:cxn>
-              <a:cxn ang="0">
-                <a:pos x="connsiteX15" y="connsiteY15"/>
-              </a:cxn>
-              <a:cxn ang="0">
-                <a:pos x="connsiteX16" y="connsiteY16"/>
+                <a:pos x="csX0" y="csY0"/>
+              </a:cxn>
+              <a:cxn ang="0">
+                <a:pos x="csX1" y="csY1"/>
+              </a:cxn>
+              <a:cxn ang="0">
+                <a:pos x="csX2" y="csY2"/>
+              </a:cxn>
+              <a:cxn ang="0">
+                <a:pos x="csX3" y="csY3"/>
+              </a:cxn>
+              <a:cxn ang="0">
+                <a:pos x="csX4" y="csY4"/>
+              </a:cxn>
+              <a:cxn ang="0">
+                <a:pos x="csX5" y="csY5"/>
+              </a:cxn>
+              <a:cxn ang="0">
+                <a:pos x="csX6" y="csY6"/>
+              </a:cxn>
+              <a:cxn ang="0">
+                <a:pos x="csX7" y="csY7"/>
+              </a:cxn>
+              <a:cxn ang="0">
+                <a:pos x="csX8" y="csY8"/>
+              </a:cxn>
+              <a:cxn ang="0">
+                <a:pos x="csX9" y="csY9"/>
+              </a:cxn>
+              <a:cxn ang="0">
+                <a:pos x="csX10" y="csY10"/>
+              </a:cxn>
+              <a:cxn ang="0">
+                <a:pos x="csX11" y="csY11"/>
+              </a:cxn>
+              <a:cxn ang="0">
+                <a:pos x="csX12" y="csY12"/>
+              </a:cxn>
+              <a:cxn ang="0">
+                <a:pos x="csX13" y="csY13"/>
+              </a:cxn>
+              <a:cxn ang="0">
+                <a:pos x="csX14" y="csY14"/>
+              </a:cxn>
+              <a:cxn ang="0">
+                <a:pos x="csX15" y="csY15"/>
+              </a:cxn>
+              <a:cxn ang="0">
+                <a:pos x="csX16" y="csY16"/>
               </a:cxn>
             </a:cxnLst>
             <a:rect l="l" t="t" r="r" b="b"/>
@@ -13984,68 +13984,68 @@
           <a:custGeom>
             <a:avLst/>
             <a:gdLst>
-              <a:gd name="connsiteX0" fmla="*/ 0 w 3255095"/>
-              <a:gd name="connsiteY0" fmla="*/ 0 h 18288"/>
-              <a:gd name="connsiteX1" fmla="*/ 618468 w 3255095"/>
-              <a:gd name="connsiteY1" fmla="*/ 0 h 18288"/>
-              <a:gd name="connsiteX2" fmla="*/ 1269487 w 3255095"/>
-              <a:gd name="connsiteY2" fmla="*/ 0 h 18288"/>
-              <a:gd name="connsiteX3" fmla="*/ 1953057 w 3255095"/>
-              <a:gd name="connsiteY3" fmla="*/ 0 h 18288"/>
-              <a:gd name="connsiteX4" fmla="*/ 2636627 w 3255095"/>
-              <a:gd name="connsiteY4" fmla="*/ 0 h 18288"/>
-              <a:gd name="connsiteX5" fmla="*/ 3255095 w 3255095"/>
-              <a:gd name="connsiteY5" fmla="*/ 0 h 18288"/>
-              <a:gd name="connsiteX6" fmla="*/ 3255095 w 3255095"/>
-              <a:gd name="connsiteY6" fmla="*/ 18288 h 18288"/>
-              <a:gd name="connsiteX7" fmla="*/ 2538974 w 3255095"/>
-              <a:gd name="connsiteY7" fmla="*/ 18288 h 18288"/>
-              <a:gd name="connsiteX8" fmla="*/ 1822853 w 3255095"/>
-              <a:gd name="connsiteY8" fmla="*/ 18288 h 18288"/>
-              <a:gd name="connsiteX9" fmla="*/ 1171834 w 3255095"/>
-              <a:gd name="connsiteY9" fmla="*/ 18288 h 18288"/>
-              <a:gd name="connsiteX10" fmla="*/ 0 w 3255095"/>
-              <a:gd name="connsiteY10" fmla="*/ 18288 h 18288"/>
-              <a:gd name="connsiteX11" fmla="*/ 0 w 3255095"/>
-              <a:gd name="connsiteY11" fmla="*/ 0 h 18288"/>
+              <a:gd name="csX0" fmla="*/ 0 w 3255095"/>
+              <a:gd name="csY0" fmla="*/ 0 h 18288"/>
+              <a:gd name="csX1" fmla="*/ 618468 w 3255095"/>
+              <a:gd name="csY1" fmla="*/ 0 h 18288"/>
+              <a:gd name="csX2" fmla="*/ 1269487 w 3255095"/>
+              <a:gd name="csY2" fmla="*/ 0 h 18288"/>
+              <a:gd name="csX3" fmla="*/ 1953057 w 3255095"/>
+              <a:gd name="csY3" fmla="*/ 0 h 18288"/>
+              <a:gd name="csX4" fmla="*/ 2636627 w 3255095"/>
+              <a:gd name="csY4" fmla="*/ 0 h 18288"/>
+              <a:gd name="csX5" fmla="*/ 3255095 w 3255095"/>
+              <a:gd name="csY5" fmla="*/ 0 h 18288"/>
+              <a:gd name="csX6" fmla="*/ 3255095 w 3255095"/>
+              <a:gd name="csY6" fmla="*/ 18288 h 18288"/>
+              <a:gd name="csX7" fmla="*/ 2538974 w 3255095"/>
+              <a:gd name="csY7" fmla="*/ 18288 h 18288"/>
+              <a:gd name="csX8" fmla="*/ 1822853 w 3255095"/>
+              <a:gd name="csY8" fmla="*/ 18288 h 18288"/>
+              <a:gd name="csX9" fmla="*/ 1171834 w 3255095"/>
+              <a:gd name="csY9" fmla="*/ 18288 h 18288"/>
+              <a:gd name="csX10" fmla="*/ 0 w 3255095"/>
+              <a:gd name="csY10" fmla="*/ 18288 h 18288"/>
+              <a:gd name="csX11" fmla="*/ 0 w 3255095"/>
+              <a:gd name="csY11" fmla="*/ 0 h 18288"/>
             </a:gdLst>
             <a:ahLst/>
             <a:cxnLst>
               <a:cxn ang="0">
-                <a:pos x="connsiteX0" y="connsiteY0"/>
-              </a:cxn>
-              <a:cxn ang="0">
-                <a:pos x="connsiteX1" y="connsiteY1"/>
-              </a:cxn>
-              <a:cxn ang="0">
-                <a:pos x="connsiteX2" y="connsiteY2"/>
-              </a:cxn>
-              <a:cxn ang="0">
-                <a:pos x="connsiteX3" y="connsiteY3"/>
-              </a:cxn>
-              <a:cxn ang="0">
-                <a:pos x="connsiteX4" y="connsiteY4"/>
-              </a:cxn>
-              <a:cxn ang="0">
-                <a:pos x="connsiteX5" y="connsiteY5"/>
-              </a:cxn>
-              <a:cxn ang="0">
-                <a:pos x="connsiteX6" y="connsiteY6"/>
-              </a:cxn>
-              <a:cxn ang="0">
-                <a:pos x="connsiteX7" y="connsiteY7"/>
-              </a:cxn>
-              <a:cxn ang="0">
-                <a:pos x="connsiteX8" y="connsiteY8"/>
-              </a:cxn>
-              <a:cxn ang="0">
-                <a:pos x="connsiteX9" y="connsiteY9"/>
-              </a:cxn>
-              <a:cxn ang="0">
-                <a:pos x="connsiteX10" y="connsiteY10"/>
-              </a:cxn>
-              <a:cxn ang="0">
-                <a:pos x="connsiteX11" y="connsiteY11"/>
+                <a:pos x="csX0" y="csY0"/>
+              </a:cxn>
+              <a:cxn ang="0">
+                <a:pos x="csX1" y="csY1"/>
+              </a:cxn>
+              <a:cxn ang="0">
+                <a:pos x="csX2" y="csY2"/>
+              </a:cxn>
+              <a:cxn ang="0">
+                <a:pos x="csX3" y="csY3"/>
+              </a:cxn>
+              <a:cxn ang="0">
+                <a:pos x="csX4" y="csY4"/>
+              </a:cxn>
+              <a:cxn ang="0">
+                <a:pos x="csX5" y="csY5"/>
+              </a:cxn>
+              <a:cxn ang="0">
+                <a:pos x="csX6" y="csY6"/>
+              </a:cxn>
+              <a:cxn ang="0">
+                <a:pos x="csX7" y="csY7"/>
+              </a:cxn>
+              <a:cxn ang="0">
+                <a:pos x="csX8" y="csY8"/>
+              </a:cxn>
+              <a:cxn ang="0">
+                <a:pos x="csX9" y="csY9"/>
+              </a:cxn>
+              <a:cxn ang="0">
+                <a:pos x="csX10" y="csY10"/>
+              </a:cxn>
+              <a:cxn ang="0">
+                <a:pos x="csX11" y="csY11"/>
               </a:cxn>
             </a:cxnLst>
             <a:rect l="l" t="t" r="r" b="b"/>
@@ -14427,103 +14427,103 @@
           <a:custGeom>
             <a:avLst/>
             <a:gdLst>
-              <a:gd name="connsiteX0" fmla="*/ 0 w 5410200"/>
-              <a:gd name="connsiteY0" fmla="*/ 0 h 18288"/>
-              <a:gd name="connsiteX1" fmla="*/ 568071 w 5410200"/>
-              <a:gd name="connsiteY1" fmla="*/ 0 h 18288"/>
-              <a:gd name="connsiteX2" fmla="*/ 1298448 w 5410200"/>
-              <a:gd name="connsiteY2" fmla="*/ 0 h 18288"/>
-              <a:gd name="connsiteX3" fmla="*/ 1920621 w 5410200"/>
-              <a:gd name="connsiteY3" fmla="*/ 0 h 18288"/>
-              <a:gd name="connsiteX4" fmla="*/ 2488692 w 5410200"/>
-              <a:gd name="connsiteY4" fmla="*/ 0 h 18288"/>
-              <a:gd name="connsiteX5" fmla="*/ 3219069 w 5410200"/>
-              <a:gd name="connsiteY5" fmla="*/ 0 h 18288"/>
-              <a:gd name="connsiteX6" fmla="*/ 3895344 w 5410200"/>
-              <a:gd name="connsiteY6" fmla="*/ 0 h 18288"/>
-              <a:gd name="connsiteX7" fmla="*/ 4571619 w 5410200"/>
-              <a:gd name="connsiteY7" fmla="*/ 0 h 18288"/>
-              <a:gd name="connsiteX8" fmla="*/ 5410200 w 5410200"/>
-              <a:gd name="connsiteY8" fmla="*/ 0 h 18288"/>
-              <a:gd name="connsiteX9" fmla="*/ 5410200 w 5410200"/>
-              <a:gd name="connsiteY9" fmla="*/ 18288 h 18288"/>
-              <a:gd name="connsiteX10" fmla="*/ 4842129 w 5410200"/>
-              <a:gd name="connsiteY10" fmla="*/ 18288 h 18288"/>
-              <a:gd name="connsiteX11" fmla="*/ 4328160 w 5410200"/>
-              <a:gd name="connsiteY11" fmla="*/ 18288 h 18288"/>
-              <a:gd name="connsiteX12" fmla="*/ 3597783 w 5410200"/>
-              <a:gd name="connsiteY12" fmla="*/ 18288 h 18288"/>
-              <a:gd name="connsiteX13" fmla="*/ 3029712 w 5410200"/>
-              <a:gd name="connsiteY13" fmla="*/ 18288 h 18288"/>
-              <a:gd name="connsiteX14" fmla="*/ 2299335 w 5410200"/>
-              <a:gd name="connsiteY14" fmla="*/ 18288 h 18288"/>
-              <a:gd name="connsiteX15" fmla="*/ 1514856 w 5410200"/>
-              <a:gd name="connsiteY15" fmla="*/ 18288 h 18288"/>
-              <a:gd name="connsiteX16" fmla="*/ 892683 w 5410200"/>
-              <a:gd name="connsiteY16" fmla="*/ 18288 h 18288"/>
-              <a:gd name="connsiteX17" fmla="*/ 0 w 5410200"/>
-              <a:gd name="connsiteY17" fmla="*/ 18288 h 18288"/>
-              <a:gd name="connsiteX18" fmla="*/ 0 w 5410200"/>
-              <a:gd name="connsiteY18" fmla="*/ 0 h 18288"/>
+              <a:gd name="csX0" fmla="*/ 0 w 5410200"/>
+              <a:gd name="csY0" fmla="*/ 0 h 18288"/>
+              <a:gd name="csX1" fmla="*/ 568071 w 5410200"/>
+              <a:gd name="csY1" fmla="*/ 0 h 18288"/>
+              <a:gd name="csX2" fmla="*/ 1298448 w 5410200"/>
+              <a:gd name="csY2" fmla="*/ 0 h 18288"/>
+              <a:gd name="csX3" fmla="*/ 1920621 w 5410200"/>
+              <a:gd name="csY3" fmla="*/ 0 h 18288"/>
+              <a:gd name="csX4" fmla="*/ 2488692 w 5410200"/>
+              <a:gd name="csY4" fmla="*/ 0 h 18288"/>
+              <a:gd name="csX5" fmla="*/ 3219069 w 5410200"/>
+              <a:gd name="csY5" fmla="*/ 0 h 18288"/>
+              <a:gd name="csX6" fmla="*/ 3895344 w 5410200"/>
+              <a:gd name="csY6" fmla="*/ 0 h 18288"/>
+              <a:gd name="csX7" fmla="*/ 4571619 w 5410200"/>
+              <a:gd name="csY7" fmla="*/ 0 h 18288"/>
+              <a:gd name="csX8" fmla="*/ 5410200 w 5410200"/>
+              <a:gd name="csY8" fmla="*/ 0 h 18288"/>
+              <a:gd name="csX9" fmla="*/ 5410200 w 5410200"/>
+              <a:gd name="csY9" fmla="*/ 18288 h 18288"/>
+              <a:gd name="csX10" fmla="*/ 4842129 w 5410200"/>
+              <a:gd name="csY10" fmla="*/ 18288 h 18288"/>
+              <a:gd name="csX11" fmla="*/ 4328160 w 5410200"/>
+              <a:gd name="csY11" fmla="*/ 18288 h 18288"/>
+              <a:gd name="csX12" fmla="*/ 3597783 w 5410200"/>
+              <a:gd name="csY12" fmla="*/ 18288 h 18288"/>
+              <a:gd name="csX13" fmla="*/ 3029712 w 5410200"/>
+              <a:gd name="csY13" fmla="*/ 18288 h 18288"/>
+              <a:gd name="csX14" fmla="*/ 2299335 w 5410200"/>
+              <a:gd name="csY14" fmla="*/ 18288 h 18288"/>
+              <a:gd name="csX15" fmla="*/ 1514856 w 5410200"/>
+              <a:gd name="csY15" fmla="*/ 18288 h 18288"/>
+              <a:gd name="csX16" fmla="*/ 892683 w 5410200"/>
+              <a:gd name="csY16" fmla="*/ 18288 h 18288"/>
+              <a:gd name="csX17" fmla="*/ 0 w 5410200"/>
+              <a:gd name="csY17" fmla="*/ 18288 h 18288"/>
+              <a:gd name="csX18" fmla="*/ 0 w 5410200"/>
+              <a:gd name="csY18" fmla="*/ 0 h 18288"/>
             </a:gdLst>
             <a:ahLst/>
             <a:cxnLst>
               <a:cxn ang="0">
-                <a:pos x="connsiteX0" y="connsiteY0"/>
-              </a:cxn>
-              <a:cxn ang="0">
-                <a:pos x="connsiteX1" y="connsiteY1"/>
-              </a:cxn>
-              <a:cxn ang="0">
-                <a:pos x="connsiteX2" y="connsiteY2"/>
-              </a:cxn>
-              <a:cxn ang="0">
-                <a:pos x="connsiteX3" y="connsiteY3"/>
-              </a:cxn>
-              <a:cxn ang="0">
-                <a:pos x="connsiteX4" y="connsiteY4"/>
-              </a:cxn>
-              <a:cxn ang="0">
-                <a:pos x="connsiteX5" y="connsiteY5"/>
-              </a:cxn>
-              <a:cxn ang="0">
-                <a:pos x="connsiteX6" y="connsiteY6"/>
-              </a:cxn>
-              <a:cxn ang="0">
-                <a:pos x="connsiteX7" y="connsiteY7"/>
-              </a:cxn>
-              <a:cxn ang="0">
-                <a:pos x="connsiteX8" y="connsiteY8"/>
-              </a:cxn>
-              <a:cxn ang="0">
-                <a:pos x="connsiteX9" y="connsiteY9"/>
-              </a:cxn>
-              <a:cxn ang="0">
-                <a:pos x="connsiteX10" y="connsiteY10"/>
-              </a:cxn>
-              <a:cxn ang="0">
-                <a:pos x="connsiteX11" y="connsiteY11"/>
-              </a:cxn>
-              <a:cxn ang="0">
-                <a:pos x="connsiteX12" y="connsiteY12"/>
-              </a:cxn>
-              <a:cxn ang="0">
-                <a:pos x="connsiteX13" y="connsiteY13"/>
-              </a:cxn>
-              <a:cxn ang="0">
-                <a:pos x="connsiteX14" y="connsiteY14"/>
-              </a:cxn>
-              <a:cxn ang="0">
-                <a:pos x="connsiteX15" y="connsiteY15"/>
-              </a:cxn>
-              <a:cxn ang="0">
-                <a:pos x="connsiteX16" y="connsiteY16"/>
-              </a:cxn>
-              <a:cxn ang="0">
-                <a:pos x="connsiteX17" y="connsiteY17"/>
-              </a:cxn>
-              <a:cxn ang="0">
-                <a:pos x="connsiteX18" y="connsiteY18"/>
+                <a:pos x="csX0" y="csY0"/>
+              </a:cxn>
+              <a:cxn ang="0">
+                <a:pos x="csX1" y="csY1"/>
+              </a:cxn>
+              <a:cxn ang="0">
+                <a:pos x="csX2" y="csY2"/>
+              </a:cxn>
+              <a:cxn ang="0">
+                <a:pos x="csX3" y="csY3"/>
+              </a:cxn>
+              <a:cxn ang="0">
+                <a:pos x="csX4" y="csY4"/>
+              </a:cxn>
+              <a:cxn ang="0">
+                <a:pos x="csX5" y="csY5"/>
+              </a:cxn>
+              <a:cxn ang="0">
+                <a:pos x="csX6" y="csY6"/>
+              </a:cxn>
+              <a:cxn ang="0">
+                <a:pos x="csX7" y="csY7"/>
+              </a:cxn>
+              <a:cxn ang="0">
+                <a:pos x="csX8" y="csY8"/>
+              </a:cxn>
+              <a:cxn ang="0">
+                <a:pos x="csX9" y="csY9"/>
+              </a:cxn>
+              <a:cxn ang="0">
+                <a:pos x="csX10" y="csY10"/>
+              </a:cxn>
+              <a:cxn ang="0">
+                <a:pos x="csX11" y="csY11"/>
+              </a:cxn>
+              <a:cxn ang="0">
+                <a:pos x="csX12" y="csY12"/>
+              </a:cxn>
+              <a:cxn ang="0">
+                <a:pos x="csX13" y="csY13"/>
+              </a:cxn>
+              <a:cxn ang="0">
+                <a:pos x="csX14" y="csY14"/>
+              </a:cxn>
+              <a:cxn ang="0">
+                <a:pos x="csX15" y="csY15"/>
+              </a:cxn>
+              <a:cxn ang="0">
+                <a:pos x="csX16" y="csY16"/>
+              </a:cxn>
+              <a:cxn ang="0">
+                <a:pos x="csX17" y="csY17"/>
+              </a:cxn>
+              <a:cxn ang="0">
+                <a:pos x="csX18" y="csY18"/>
               </a:cxn>
             </a:cxnLst>
             <a:rect l="l" t="t" r="r" b="b"/>
@@ -15051,103 +15051,103 @@
           <a:custGeom>
             <a:avLst/>
             <a:gdLst>
-              <a:gd name="connsiteX0" fmla="*/ 0 w 5410200"/>
-              <a:gd name="connsiteY0" fmla="*/ 0 h 18288"/>
-              <a:gd name="connsiteX1" fmla="*/ 568071 w 5410200"/>
-              <a:gd name="connsiteY1" fmla="*/ 0 h 18288"/>
-              <a:gd name="connsiteX2" fmla="*/ 1298448 w 5410200"/>
-              <a:gd name="connsiteY2" fmla="*/ 0 h 18288"/>
-              <a:gd name="connsiteX3" fmla="*/ 1920621 w 5410200"/>
-              <a:gd name="connsiteY3" fmla="*/ 0 h 18288"/>
-              <a:gd name="connsiteX4" fmla="*/ 2488692 w 5410200"/>
-              <a:gd name="connsiteY4" fmla="*/ 0 h 18288"/>
-              <a:gd name="connsiteX5" fmla="*/ 3219069 w 5410200"/>
-              <a:gd name="connsiteY5" fmla="*/ 0 h 18288"/>
-              <a:gd name="connsiteX6" fmla="*/ 3895344 w 5410200"/>
-              <a:gd name="connsiteY6" fmla="*/ 0 h 18288"/>
-              <a:gd name="connsiteX7" fmla="*/ 4571619 w 5410200"/>
-              <a:gd name="connsiteY7" fmla="*/ 0 h 18288"/>
-              <a:gd name="connsiteX8" fmla="*/ 5410200 w 5410200"/>
-              <a:gd name="connsiteY8" fmla="*/ 0 h 18288"/>
-              <a:gd name="connsiteX9" fmla="*/ 5410200 w 5410200"/>
-              <a:gd name="connsiteY9" fmla="*/ 18288 h 18288"/>
-              <a:gd name="connsiteX10" fmla="*/ 4842129 w 5410200"/>
-              <a:gd name="connsiteY10" fmla="*/ 18288 h 18288"/>
-              <a:gd name="connsiteX11" fmla="*/ 4328160 w 5410200"/>
-              <a:gd name="connsiteY11" fmla="*/ 18288 h 18288"/>
-              <a:gd name="connsiteX12" fmla="*/ 3597783 w 5410200"/>
-              <a:gd name="connsiteY12" fmla="*/ 18288 h 18288"/>
-              <a:gd name="connsiteX13" fmla="*/ 3029712 w 5410200"/>
-              <a:gd name="connsiteY13" fmla="*/ 18288 h 18288"/>
-              <a:gd name="connsiteX14" fmla="*/ 2299335 w 5410200"/>
-              <a:gd name="connsiteY14" fmla="*/ 18288 h 18288"/>
-              <a:gd name="connsiteX15" fmla="*/ 1514856 w 5410200"/>
-              <a:gd name="connsiteY15" fmla="*/ 18288 h 18288"/>
-              <a:gd name="connsiteX16" fmla="*/ 892683 w 5410200"/>
-              <a:gd name="connsiteY16" fmla="*/ 18288 h 18288"/>
-              <a:gd name="connsiteX17" fmla="*/ 0 w 5410200"/>
-              <a:gd name="connsiteY17" fmla="*/ 18288 h 18288"/>
-              <a:gd name="connsiteX18" fmla="*/ 0 w 5410200"/>
-              <a:gd name="connsiteY18" fmla="*/ 0 h 18288"/>
+              <a:gd name="csX0" fmla="*/ 0 w 5410200"/>
+              <a:gd name="csY0" fmla="*/ 0 h 18288"/>
+              <a:gd name="csX1" fmla="*/ 568071 w 5410200"/>
+              <a:gd name="csY1" fmla="*/ 0 h 18288"/>
+              <a:gd name="csX2" fmla="*/ 1298448 w 5410200"/>
+              <a:gd name="csY2" fmla="*/ 0 h 18288"/>
+              <a:gd name="csX3" fmla="*/ 1920621 w 5410200"/>
+              <a:gd name="csY3" fmla="*/ 0 h 18288"/>
+              <a:gd name="csX4" fmla="*/ 2488692 w 5410200"/>
+              <a:gd name="csY4" fmla="*/ 0 h 18288"/>
+              <a:gd name="csX5" fmla="*/ 3219069 w 5410200"/>
+              <a:gd name="csY5" fmla="*/ 0 h 18288"/>
+              <a:gd name="csX6" fmla="*/ 3895344 w 5410200"/>
+              <a:gd name="csY6" fmla="*/ 0 h 18288"/>
+              <a:gd name="csX7" fmla="*/ 4571619 w 5410200"/>
+              <a:gd name="csY7" fmla="*/ 0 h 18288"/>
+              <a:gd name="csX8" fmla="*/ 5410200 w 5410200"/>
+              <a:gd name="csY8" fmla="*/ 0 h 18288"/>
+              <a:gd name="csX9" fmla="*/ 5410200 w 5410200"/>
+              <a:gd name="csY9" fmla="*/ 18288 h 18288"/>
+              <a:gd name="csX10" fmla="*/ 4842129 w 5410200"/>
+              <a:gd name="csY10" fmla="*/ 18288 h 18288"/>
+              <a:gd name="csX11" fmla="*/ 4328160 w 5410200"/>
+              <a:gd name="csY11" fmla="*/ 18288 h 18288"/>
+              <a:gd name="csX12" fmla="*/ 3597783 w 5410200"/>
+              <a:gd name="csY12" fmla="*/ 18288 h 18288"/>
+              <a:gd name="csX13" fmla="*/ 3029712 w 5410200"/>
+              <a:gd name="csY13" fmla="*/ 18288 h 18288"/>
+              <a:gd name="csX14" fmla="*/ 2299335 w 5410200"/>
+              <a:gd name="csY14" fmla="*/ 18288 h 18288"/>
+              <a:gd name="csX15" fmla="*/ 1514856 w 5410200"/>
+              <a:gd name="csY15" fmla="*/ 18288 h 18288"/>
+              <a:gd name="csX16" fmla="*/ 892683 w 5410200"/>
+              <a:gd name="csY16" fmla="*/ 18288 h 18288"/>
+              <a:gd name="csX17" fmla="*/ 0 w 5410200"/>
+              <a:gd name="csY17" fmla="*/ 18288 h 18288"/>
+              <a:gd name="csX18" fmla="*/ 0 w 5410200"/>
+              <a:gd name="csY18" fmla="*/ 0 h 18288"/>
             </a:gdLst>
             <a:ahLst/>
             <a:cxnLst>
               <a:cxn ang="0">
-                <a:pos x="connsiteX0" y="connsiteY0"/>
-              </a:cxn>
-              <a:cxn ang="0">
-                <a:pos x="connsiteX1" y="connsiteY1"/>
-              </a:cxn>
-              <a:cxn ang="0">
-                <a:pos x="connsiteX2" y="connsiteY2"/>
-              </a:cxn>
-              <a:cxn ang="0">
-                <a:pos x="connsiteX3" y="connsiteY3"/>
-              </a:cxn>
-              <a:cxn ang="0">
-                <a:pos x="connsiteX4" y="connsiteY4"/>
-              </a:cxn>
-              <a:cxn ang="0">
-                <a:pos x="connsiteX5" y="connsiteY5"/>
-              </a:cxn>
-              <a:cxn ang="0">
-                <a:pos x="connsiteX6" y="connsiteY6"/>
-              </a:cxn>
-              <a:cxn ang="0">
-                <a:pos x="connsiteX7" y="connsiteY7"/>
-              </a:cxn>
-              <a:cxn ang="0">
-                <a:pos x="connsiteX8" y="connsiteY8"/>
-              </a:cxn>
-              <a:cxn ang="0">
-                <a:pos x="connsiteX9" y="connsiteY9"/>
-              </a:cxn>
-              <a:cxn ang="0">
-                <a:pos x="connsiteX10" y="connsiteY10"/>
-              </a:cxn>
-              <a:cxn ang="0">
-                <a:pos x="connsiteX11" y="connsiteY11"/>
-              </a:cxn>
-              <a:cxn ang="0">
-                <a:pos x="connsiteX12" y="connsiteY12"/>
-              </a:cxn>
-              <a:cxn ang="0">
-                <a:pos x="connsiteX13" y="connsiteY13"/>
-              </a:cxn>
-              <a:cxn ang="0">
-                <a:pos x="connsiteX14" y="connsiteY14"/>
-              </a:cxn>
-              <a:cxn ang="0">
-                <a:pos x="connsiteX15" y="connsiteY15"/>
-              </a:cxn>
-              <a:cxn ang="0">
-                <a:pos x="connsiteX16" y="connsiteY16"/>
-              </a:cxn>
-              <a:cxn ang="0">
-                <a:pos x="connsiteX17" y="connsiteY17"/>
-              </a:cxn>
-              <a:cxn ang="0">
-                <a:pos x="connsiteX18" y="connsiteY18"/>
+                <a:pos x="csX0" y="csY0"/>
+              </a:cxn>
+              <a:cxn ang="0">
+                <a:pos x="csX1" y="csY1"/>
+              </a:cxn>
+              <a:cxn ang="0">
+                <a:pos x="csX2" y="csY2"/>
+              </a:cxn>
+              <a:cxn ang="0">
+                <a:pos x="csX3" y="csY3"/>
+              </a:cxn>
+              <a:cxn ang="0">
+                <a:pos x="csX4" y="csY4"/>
+              </a:cxn>
+              <a:cxn ang="0">
+                <a:pos x="csX5" y="csY5"/>
+              </a:cxn>
+              <a:cxn ang="0">
+                <a:pos x="csX6" y="csY6"/>
+              </a:cxn>
+              <a:cxn ang="0">
+                <a:pos x="csX7" y="csY7"/>
+              </a:cxn>
+              <a:cxn ang="0">
+                <a:pos x="csX8" y="csY8"/>
+              </a:cxn>
+              <a:cxn ang="0">
+                <a:pos x="csX9" y="csY9"/>
+              </a:cxn>
+              <a:cxn ang="0">
+                <a:pos x="csX10" y="csY10"/>
+              </a:cxn>
+              <a:cxn ang="0">
+                <a:pos x="csX11" y="csY11"/>
+              </a:cxn>
+              <a:cxn ang="0">
+                <a:pos x="csX12" y="csY12"/>
+              </a:cxn>
+              <a:cxn ang="0">
+                <a:pos x="csX13" y="csY13"/>
+              </a:cxn>
+              <a:cxn ang="0">
+                <a:pos x="csX14" y="csY14"/>
+              </a:cxn>
+              <a:cxn ang="0">
+                <a:pos x="csX15" y="csY15"/>
+              </a:cxn>
+              <a:cxn ang="0">
+                <a:pos x="csX16" y="csY16"/>
+              </a:cxn>
+              <a:cxn ang="0">
+                <a:pos x="csX17" y="csY17"/>
+              </a:cxn>
+              <a:cxn ang="0">
+                <a:pos x="csX18" y="csY18"/>
               </a:cxn>
             </a:cxnLst>
             <a:rect l="l" t="t" r="r" b="b"/>
@@ -15668,68 +15668,68 @@
           <a:custGeom>
             <a:avLst/>
             <a:gdLst>
-              <a:gd name="connsiteX0" fmla="*/ 0 w 3255095"/>
-              <a:gd name="connsiteY0" fmla="*/ 0 h 18288"/>
-              <a:gd name="connsiteX1" fmla="*/ 618468 w 3255095"/>
-              <a:gd name="connsiteY1" fmla="*/ 0 h 18288"/>
-              <a:gd name="connsiteX2" fmla="*/ 1269487 w 3255095"/>
-              <a:gd name="connsiteY2" fmla="*/ 0 h 18288"/>
-              <a:gd name="connsiteX3" fmla="*/ 1953057 w 3255095"/>
-              <a:gd name="connsiteY3" fmla="*/ 0 h 18288"/>
-              <a:gd name="connsiteX4" fmla="*/ 2636627 w 3255095"/>
-              <a:gd name="connsiteY4" fmla="*/ 0 h 18288"/>
-              <a:gd name="connsiteX5" fmla="*/ 3255095 w 3255095"/>
-              <a:gd name="connsiteY5" fmla="*/ 0 h 18288"/>
-              <a:gd name="connsiteX6" fmla="*/ 3255095 w 3255095"/>
-              <a:gd name="connsiteY6" fmla="*/ 18288 h 18288"/>
-              <a:gd name="connsiteX7" fmla="*/ 2538974 w 3255095"/>
-              <a:gd name="connsiteY7" fmla="*/ 18288 h 18288"/>
-              <a:gd name="connsiteX8" fmla="*/ 1822853 w 3255095"/>
-              <a:gd name="connsiteY8" fmla="*/ 18288 h 18288"/>
-              <a:gd name="connsiteX9" fmla="*/ 1171834 w 3255095"/>
-              <a:gd name="connsiteY9" fmla="*/ 18288 h 18288"/>
-              <a:gd name="connsiteX10" fmla="*/ 0 w 3255095"/>
-              <a:gd name="connsiteY10" fmla="*/ 18288 h 18288"/>
-              <a:gd name="connsiteX11" fmla="*/ 0 w 3255095"/>
-              <a:gd name="connsiteY11" fmla="*/ 0 h 18288"/>
+              <a:gd name="csX0" fmla="*/ 0 w 3255095"/>
+              <a:gd name="csY0" fmla="*/ 0 h 18288"/>
+              <a:gd name="csX1" fmla="*/ 618468 w 3255095"/>
+              <a:gd name="csY1" fmla="*/ 0 h 18288"/>
+              <a:gd name="csX2" fmla="*/ 1269487 w 3255095"/>
+              <a:gd name="csY2" fmla="*/ 0 h 18288"/>
+              <a:gd name="csX3" fmla="*/ 1953057 w 3255095"/>
+              <a:gd name="csY3" fmla="*/ 0 h 18288"/>
+              <a:gd name="csX4" fmla="*/ 2636627 w 3255095"/>
+              <a:gd name="csY4" fmla="*/ 0 h 18288"/>
+              <a:gd name="csX5" fmla="*/ 3255095 w 3255095"/>
+              <a:gd name="csY5" fmla="*/ 0 h 18288"/>
+              <a:gd name="csX6" fmla="*/ 3255095 w 3255095"/>
+              <a:gd name="csY6" fmla="*/ 18288 h 18288"/>
+              <a:gd name="csX7" fmla="*/ 2538974 w 3255095"/>
+              <a:gd name="csY7" fmla="*/ 18288 h 18288"/>
+              <a:gd name="csX8" fmla="*/ 1822853 w 3255095"/>
+              <a:gd name="csY8" fmla="*/ 18288 h 18288"/>
+              <a:gd name="csX9" fmla="*/ 1171834 w 3255095"/>
+              <a:gd name="csY9" fmla="*/ 18288 h 18288"/>
+              <a:gd name="csX10" fmla="*/ 0 w 3255095"/>
+              <a:gd name="csY10" fmla="*/ 18288 h 18288"/>
+              <a:gd name="csX11" fmla="*/ 0 w 3255095"/>
+              <a:gd name="csY11" fmla="*/ 0 h 18288"/>
             </a:gdLst>
             <a:ahLst/>
             <a:cxnLst>
               <a:cxn ang="0">
-                <a:pos x="connsiteX0" y="connsiteY0"/>
-              </a:cxn>
-              <a:cxn ang="0">
-                <a:pos x="connsiteX1" y="connsiteY1"/>
-              </a:cxn>
-              <a:cxn ang="0">
-                <a:pos x="connsiteX2" y="connsiteY2"/>
-              </a:cxn>
-              <a:cxn ang="0">
-                <a:pos x="connsiteX3" y="connsiteY3"/>
-              </a:cxn>
-              <a:cxn ang="0">
-                <a:pos x="connsiteX4" y="connsiteY4"/>
-              </a:cxn>
-              <a:cxn ang="0">
-                <a:pos x="connsiteX5" y="connsiteY5"/>
-              </a:cxn>
-              <a:cxn ang="0">
-                <a:pos x="connsiteX6" y="connsiteY6"/>
-              </a:cxn>
-              <a:cxn ang="0">
-                <a:pos x="connsiteX7" y="connsiteY7"/>
-              </a:cxn>
-              <a:cxn ang="0">
-                <a:pos x="connsiteX8" y="connsiteY8"/>
-              </a:cxn>
-              <a:cxn ang="0">
-                <a:pos x="connsiteX9" y="connsiteY9"/>
-              </a:cxn>
-              <a:cxn ang="0">
-                <a:pos x="connsiteX10" y="connsiteY10"/>
-              </a:cxn>
-              <a:cxn ang="0">
-                <a:pos x="connsiteX11" y="connsiteY11"/>
+                <a:pos x="csX0" y="csY0"/>
+              </a:cxn>
+              <a:cxn ang="0">
+                <a:pos x="csX1" y="csY1"/>
+              </a:cxn>
+              <a:cxn ang="0">
+                <a:pos x="csX2" y="csY2"/>
+              </a:cxn>
+              <a:cxn ang="0">
+                <a:pos x="csX3" y="csY3"/>
+              </a:cxn>
+              <a:cxn ang="0">
+                <a:pos x="csX4" y="csY4"/>
+              </a:cxn>
+              <a:cxn ang="0">
+                <a:pos x="csX5" y="csY5"/>
+              </a:cxn>
+              <a:cxn ang="0">
+                <a:pos x="csX6" y="csY6"/>
+              </a:cxn>
+              <a:cxn ang="0">
+                <a:pos x="csX7" y="csY7"/>
+              </a:cxn>
+              <a:cxn ang="0">
+                <a:pos x="csX8" y="csY8"/>
+              </a:cxn>
+              <a:cxn ang="0">
+                <a:pos x="csX9" y="csY9"/>
+              </a:cxn>
+              <a:cxn ang="0">
+                <a:pos x="csX10" y="csY10"/>
+              </a:cxn>
+              <a:cxn ang="0">
+                <a:pos x="csX11" y="csY11"/>
               </a:cxn>
             </a:cxnLst>
             <a:rect l="l" t="t" r="r" b="b"/>
@@ -19276,68 +19276,68 @@
           <a:custGeom>
             <a:avLst/>
             <a:gdLst>
-              <a:gd name="connsiteX0" fmla="*/ 0 w 3255095"/>
-              <a:gd name="connsiteY0" fmla="*/ 0 h 18288"/>
-              <a:gd name="connsiteX1" fmla="*/ 618468 w 3255095"/>
-              <a:gd name="connsiteY1" fmla="*/ 0 h 18288"/>
-              <a:gd name="connsiteX2" fmla="*/ 1269487 w 3255095"/>
-              <a:gd name="connsiteY2" fmla="*/ 0 h 18288"/>
-              <a:gd name="connsiteX3" fmla="*/ 1953057 w 3255095"/>
-              <a:gd name="connsiteY3" fmla="*/ 0 h 18288"/>
-              <a:gd name="connsiteX4" fmla="*/ 2636627 w 3255095"/>
-              <a:gd name="connsiteY4" fmla="*/ 0 h 18288"/>
-              <a:gd name="connsiteX5" fmla="*/ 3255095 w 3255095"/>
-              <a:gd name="connsiteY5" fmla="*/ 0 h 18288"/>
-              <a:gd name="connsiteX6" fmla="*/ 3255095 w 3255095"/>
-              <a:gd name="connsiteY6" fmla="*/ 18288 h 18288"/>
-              <a:gd name="connsiteX7" fmla="*/ 2538974 w 3255095"/>
-              <a:gd name="connsiteY7" fmla="*/ 18288 h 18288"/>
-              <a:gd name="connsiteX8" fmla="*/ 1822853 w 3255095"/>
-              <a:gd name="connsiteY8" fmla="*/ 18288 h 18288"/>
-              <a:gd name="connsiteX9" fmla="*/ 1171834 w 3255095"/>
-              <a:gd name="connsiteY9" fmla="*/ 18288 h 18288"/>
-              <a:gd name="connsiteX10" fmla="*/ 0 w 3255095"/>
-              <a:gd name="connsiteY10" fmla="*/ 18288 h 18288"/>
-              <a:gd name="connsiteX11" fmla="*/ 0 w 3255095"/>
-              <a:gd name="connsiteY11" fmla="*/ 0 h 18288"/>
+              <a:gd name="csX0" fmla="*/ 0 w 3255095"/>
+              <a:gd name="csY0" fmla="*/ 0 h 18288"/>
+              <a:gd name="csX1" fmla="*/ 618468 w 3255095"/>
+              <a:gd name="csY1" fmla="*/ 0 h 18288"/>
+              <a:gd name="csX2" fmla="*/ 1269487 w 3255095"/>
+              <a:gd name="csY2" fmla="*/ 0 h 18288"/>
+              <a:gd name="csX3" fmla="*/ 1953057 w 3255095"/>
+              <a:gd name="csY3" fmla="*/ 0 h 18288"/>
+              <a:gd name="csX4" fmla="*/ 2636627 w 3255095"/>
+              <a:gd name="csY4" fmla="*/ 0 h 18288"/>
+              <a:gd name="csX5" fmla="*/ 3255095 w 3255095"/>
+              <a:gd name="csY5" fmla="*/ 0 h 18288"/>
+              <a:gd name="csX6" fmla="*/ 3255095 w 3255095"/>
+              <a:gd name="csY6" fmla="*/ 18288 h 18288"/>
+              <a:gd name="csX7" fmla="*/ 2538974 w 3255095"/>
+              <a:gd name="csY7" fmla="*/ 18288 h 18288"/>
+              <a:gd name="csX8" fmla="*/ 1822853 w 3255095"/>
+              <a:gd name="csY8" fmla="*/ 18288 h 18288"/>
+              <a:gd name="csX9" fmla="*/ 1171834 w 3255095"/>
+              <a:gd name="csY9" fmla="*/ 18288 h 18288"/>
+              <a:gd name="csX10" fmla="*/ 0 w 3255095"/>
+              <a:gd name="csY10" fmla="*/ 18288 h 18288"/>
+              <a:gd name="csX11" fmla="*/ 0 w 3255095"/>
+              <a:gd name="csY11" fmla="*/ 0 h 18288"/>
             </a:gdLst>
             <a:ahLst/>
             <a:cxnLst>
               <a:cxn ang="0">
-                <a:pos x="connsiteX0" y="connsiteY0"/>
-              </a:cxn>
-              <a:cxn ang="0">
-                <a:pos x="connsiteX1" y="connsiteY1"/>
-              </a:cxn>
-              <a:cxn ang="0">
-                <a:pos x="connsiteX2" y="connsiteY2"/>
-              </a:cxn>
-              <a:cxn ang="0">
-                <a:pos x="connsiteX3" y="connsiteY3"/>
-              </a:cxn>
-              <a:cxn ang="0">
-                <a:pos x="connsiteX4" y="connsiteY4"/>
-              </a:cxn>
-              <a:cxn ang="0">
-                <a:pos x="connsiteX5" y="connsiteY5"/>
-              </a:cxn>
-              <a:cxn ang="0">
-                <a:pos x="connsiteX6" y="connsiteY6"/>
-              </a:cxn>
-              <a:cxn ang="0">
-                <a:pos x="connsiteX7" y="connsiteY7"/>
-              </a:cxn>
-              <a:cxn ang="0">
-                <a:pos x="connsiteX8" y="connsiteY8"/>
-              </a:cxn>
-              <a:cxn ang="0">
-                <a:pos x="connsiteX9" y="connsiteY9"/>
-              </a:cxn>
-              <a:cxn ang="0">
-                <a:pos x="connsiteX10" y="connsiteY10"/>
-              </a:cxn>
-              <a:cxn ang="0">
-                <a:pos x="connsiteX11" y="connsiteY11"/>
+                <a:pos x="csX0" y="csY0"/>
+              </a:cxn>
+              <a:cxn ang="0">
+                <a:pos x="csX1" y="csY1"/>
+              </a:cxn>
+              <a:cxn ang="0">
+                <a:pos x="csX2" y="csY2"/>
+              </a:cxn>
+              <a:cxn ang="0">
+                <a:pos x="csX3" y="csY3"/>
+              </a:cxn>
+              <a:cxn ang="0">
+                <a:pos x="csX4" y="csY4"/>
+              </a:cxn>
+              <a:cxn ang="0">
+                <a:pos x="csX5" y="csY5"/>
+              </a:cxn>
+              <a:cxn ang="0">
+                <a:pos x="csX6" y="csY6"/>
+              </a:cxn>
+              <a:cxn ang="0">
+                <a:pos x="csX7" y="csY7"/>
+              </a:cxn>
+              <a:cxn ang="0">
+                <a:pos x="csX8" y="csY8"/>
+              </a:cxn>
+              <a:cxn ang="0">
+                <a:pos x="csX9" y="csY9"/>
+              </a:cxn>
+              <a:cxn ang="0">
+                <a:pos x="csX10" y="csY10"/>
+              </a:cxn>
+              <a:cxn ang="0">
+                <a:pos x="csX11" y="csY11"/>
               </a:cxn>
             </a:cxnLst>
             <a:rect l="l" t="t" r="r" b="b"/>
@@ -20450,68 +20450,68 @@
           <a:custGeom>
             <a:avLst/>
             <a:gdLst>
-              <a:gd name="connsiteX0" fmla="*/ 0 w 3255095"/>
-              <a:gd name="connsiteY0" fmla="*/ 0 h 18288"/>
-              <a:gd name="connsiteX1" fmla="*/ 618468 w 3255095"/>
-              <a:gd name="connsiteY1" fmla="*/ 0 h 18288"/>
-              <a:gd name="connsiteX2" fmla="*/ 1269487 w 3255095"/>
-              <a:gd name="connsiteY2" fmla="*/ 0 h 18288"/>
-              <a:gd name="connsiteX3" fmla="*/ 1953057 w 3255095"/>
-              <a:gd name="connsiteY3" fmla="*/ 0 h 18288"/>
-              <a:gd name="connsiteX4" fmla="*/ 2636627 w 3255095"/>
-              <a:gd name="connsiteY4" fmla="*/ 0 h 18288"/>
-              <a:gd name="connsiteX5" fmla="*/ 3255095 w 3255095"/>
-              <a:gd name="connsiteY5" fmla="*/ 0 h 18288"/>
-              <a:gd name="connsiteX6" fmla="*/ 3255095 w 3255095"/>
-              <a:gd name="connsiteY6" fmla="*/ 18288 h 18288"/>
-              <a:gd name="connsiteX7" fmla="*/ 2538974 w 3255095"/>
-              <a:gd name="connsiteY7" fmla="*/ 18288 h 18288"/>
-              <a:gd name="connsiteX8" fmla="*/ 1822853 w 3255095"/>
-              <a:gd name="connsiteY8" fmla="*/ 18288 h 18288"/>
-              <a:gd name="connsiteX9" fmla="*/ 1171834 w 3255095"/>
-              <a:gd name="connsiteY9" fmla="*/ 18288 h 18288"/>
-              <a:gd name="connsiteX10" fmla="*/ 0 w 3255095"/>
-              <a:gd name="connsiteY10" fmla="*/ 18288 h 18288"/>
-              <a:gd name="connsiteX11" fmla="*/ 0 w 3255095"/>
-              <a:gd name="connsiteY11" fmla="*/ 0 h 18288"/>
+              <a:gd name="csX0" fmla="*/ 0 w 3255095"/>
+              <a:gd name="csY0" fmla="*/ 0 h 18288"/>
+              <a:gd name="csX1" fmla="*/ 618468 w 3255095"/>
+              <a:gd name="csY1" fmla="*/ 0 h 18288"/>
+              <a:gd name="csX2" fmla="*/ 1269487 w 3255095"/>
+              <a:gd name="csY2" fmla="*/ 0 h 18288"/>
+              <a:gd name="csX3" fmla="*/ 1953057 w 3255095"/>
+              <a:gd name="csY3" fmla="*/ 0 h 18288"/>
+              <a:gd name="csX4" fmla="*/ 2636627 w 3255095"/>
+              <a:gd name="csY4" fmla="*/ 0 h 18288"/>
+              <a:gd name="csX5" fmla="*/ 3255095 w 3255095"/>
+              <a:gd name="csY5" fmla="*/ 0 h 18288"/>
+              <a:gd name="csX6" fmla="*/ 3255095 w 3255095"/>
+              <a:gd name="csY6" fmla="*/ 18288 h 18288"/>
+              <a:gd name="csX7" fmla="*/ 2538974 w 3255095"/>
+              <a:gd name="csY7" fmla="*/ 18288 h 18288"/>
+              <a:gd name="csX8" fmla="*/ 1822853 w 3255095"/>
+              <a:gd name="csY8" fmla="*/ 18288 h 18288"/>
+              <a:gd name="csX9" fmla="*/ 1171834 w 3255095"/>
+              <a:gd name="csY9" fmla="*/ 18288 h 18288"/>
+              <a:gd name="csX10" fmla="*/ 0 w 3255095"/>
+              <a:gd name="csY10" fmla="*/ 18288 h 18288"/>
+              <a:gd name="csX11" fmla="*/ 0 w 3255095"/>
+              <a:gd name="csY11" fmla="*/ 0 h 18288"/>
             </a:gdLst>
             <a:ahLst/>
             <a:cxnLst>
               <a:cxn ang="0">
-                <a:pos x="connsiteX0" y="connsiteY0"/>
-              </a:cxn>
-              <a:cxn ang="0">
-                <a:pos x="connsiteX1" y="connsiteY1"/>
-              </a:cxn>
-              <a:cxn ang="0">
-                <a:pos x="connsiteX2" y="connsiteY2"/>
-              </a:cxn>
-              <a:cxn ang="0">
-                <a:pos x="connsiteX3" y="connsiteY3"/>
-              </a:cxn>
-              <a:cxn ang="0">
-                <a:pos x="connsiteX4" y="connsiteY4"/>
-              </a:cxn>
-              <a:cxn ang="0">
-                <a:pos x="connsiteX5" y="connsiteY5"/>
-              </a:cxn>
-              <a:cxn ang="0">
-                <a:pos x="connsiteX6" y="connsiteY6"/>
-              </a:cxn>
-              <a:cxn ang="0">
-                <a:pos x="connsiteX7" y="connsiteY7"/>
-              </a:cxn>
-              <a:cxn ang="0">
-                <a:pos x="connsiteX8" y="connsiteY8"/>
-              </a:cxn>
-              <a:cxn ang="0">
-                <a:pos x="connsiteX9" y="connsiteY9"/>
-              </a:cxn>
-              <a:cxn ang="0">
-                <a:pos x="connsiteX10" y="connsiteY10"/>
-              </a:cxn>
-              <a:cxn ang="0">
-                <a:pos x="connsiteX11" y="connsiteY11"/>
+                <a:pos x="csX0" y="csY0"/>
+              </a:cxn>
+              <a:cxn ang="0">
+                <a:pos x="csX1" y="csY1"/>
+              </a:cxn>
+              <a:cxn ang="0">
+                <a:pos x="csX2" y="csY2"/>
+              </a:cxn>
+              <a:cxn ang="0">
+                <a:pos x="csX3" y="csY3"/>
+              </a:cxn>
+              <a:cxn ang="0">
+                <a:pos x="csX4" y="csY4"/>
+              </a:cxn>
+              <a:cxn ang="0">
+                <a:pos x="csX5" y="csY5"/>
+              </a:cxn>
+              <a:cxn ang="0">
+                <a:pos x="csX6" y="csY6"/>
+              </a:cxn>
+              <a:cxn ang="0">
+                <a:pos x="csX7" y="csY7"/>
+              </a:cxn>
+              <a:cxn ang="0">
+                <a:pos x="csX8" y="csY8"/>
+              </a:cxn>
+              <a:cxn ang="0">
+                <a:pos x="csX9" y="csY9"/>
+              </a:cxn>
+              <a:cxn ang="0">
+                <a:pos x="csX10" y="csY10"/>
+              </a:cxn>
+              <a:cxn ang="0">
+                <a:pos x="csX11" y="csY11"/>
               </a:cxn>
             </a:cxnLst>
             <a:rect l="l" t="t" r="r" b="b"/>
@@ -21399,68 +21399,68 @@
           <a:custGeom>
             <a:avLst/>
             <a:gdLst>
-              <a:gd name="connsiteX0" fmla="*/ 0 w 3255095"/>
-              <a:gd name="connsiteY0" fmla="*/ 0 h 18288"/>
-              <a:gd name="connsiteX1" fmla="*/ 618468 w 3255095"/>
-              <a:gd name="connsiteY1" fmla="*/ 0 h 18288"/>
-              <a:gd name="connsiteX2" fmla="*/ 1269487 w 3255095"/>
-              <a:gd name="connsiteY2" fmla="*/ 0 h 18288"/>
-              <a:gd name="connsiteX3" fmla="*/ 1953057 w 3255095"/>
-              <a:gd name="connsiteY3" fmla="*/ 0 h 18288"/>
-              <a:gd name="connsiteX4" fmla="*/ 2636627 w 3255095"/>
-              <a:gd name="connsiteY4" fmla="*/ 0 h 18288"/>
-              <a:gd name="connsiteX5" fmla="*/ 3255095 w 3255095"/>
-              <a:gd name="connsiteY5" fmla="*/ 0 h 18288"/>
-              <a:gd name="connsiteX6" fmla="*/ 3255095 w 3255095"/>
-              <a:gd name="connsiteY6" fmla="*/ 18288 h 18288"/>
-              <a:gd name="connsiteX7" fmla="*/ 2538974 w 3255095"/>
-              <a:gd name="connsiteY7" fmla="*/ 18288 h 18288"/>
-              <a:gd name="connsiteX8" fmla="*/ 1822853 w 3255095"/>
-              <a:gd name="connsiteY8" fmla="*/ 18288 h 18288"/>
-              <a:gd name="connsiteX9" fmla="*/ 1171834 w 3255095"/>
-              <a:gd name="connsiteY9" fmla="*/ 18288 h 18288"/>
-              <a:gd name="connsiteX10" fmla="*/ 0 w 3255095"/>
-              <a:gd name="connsiteY10" fmla="*/ 18288 h 18288"/>
-              <a:gd name="connsiteX11" fmla="*/ 0 w 3255095"/>
-              <a:gd name="connsiteY11" fmla="*/ 0 h 18288"/>
+              <a:gd name="csX0" fmla="*/ 0 w 3255095"/>
+              <a:gd name="csY0" fmla="*/ 0 h 18288"/>
+              <a:gd name="csX1" fmla="*/ 618468 w 3255095"/>
+              <a:gd name="csY1" fmla="*/ 0 h 18288"/>
+              <a:gd name="csX2" fmla="*/ 1269487 w 3255095"/>
+              <a:gd name="csY2" fmla="*/ 0 h 18288"/>
+              <a:gd name="csX3" fmla="*/ 1953057 w 3255095"/>
+              <a:gd name="csY3" fmla="*/ 0 h 18288"/>
+              <a:gd name="csX4" fmla="*/ 2636627 w 3255095"/>
+              <a:gd name="csY4" fmla="*/ 0 h 18288"/>
+              <a:gd name="csX5" fmla="*/ 3255095 w 3255095"/>
+              <a:gd name="csY5" fmla="*/ 0 h 18288"/>
+              <a:gd name="csX6" fmla="*/ 3255095 w 3255095"/>
+              <a:gd name="csY6" fmla="*/ 18288 h 18288"/>
+              <a:gd name="csX7" fmla="*/ 2538974 w 3255095"/>
+              <a:gd name="csY7" fmla="*/ 18288 h 18288"/>
+              <a:gd name="csX8" fmla="*/ 1822853 w 3255095"/>
+              <a:gd name="csY8" fmla="*/ 18288 h 18288"/>
+              <a:gd name="csX9" fmla="*/ 1171834 w 3255095"/>
+              <a:gd name="csY9" fmla="*/ 18288 h 18288"/>
+              <a:gd name="csX10" fmla="*/ 0 w 3255095"/>
+              <a:gd name="csY10" fmla="*/ 18288 h 18288"/>
+              <a:gd name="csX11" fmla="*/ 0 w 3255095"/>
+              <a:gd name="csY11" fmla="*/ 0 h 18288"/>
             </a:gdLst>
             <a:ahLst/>
             <a:cxnLst>
               <a:cxn ang="0">
-                <a:pos x="connsiteX0" y="connsiteY0"/>
-              </a:cxn>
-              <a:cxn ang="0">
-                <a:pos x="connsiteX1" y="connsiteY1"/>
-              </a:cxn>
-              <a:cxn ang="0">
-                <a:pos x="connsiteX2" y="connsiteY2"/>
-              </a:cxn>
-              <a:cxn ang="0">
-                <a:pos x="connsiteX3" y="connsiteY3"/>
-              </a:cxn>
-              <a:cxn ang="0">
-                <a:pos x="connsiteX4" y="connsiteY4"/>
-              </a:cxn>
-              <a:cxn ang="0">
-                <a:pos x="connsiteX5" y="connsiteY5"/>
-              </a:cxn>
-              <a:cxn ang="0">
-                <a:pos x="connsiteX6" y="connsiteY6"/>
-              </a:cxn>
-              <a:cxn ang="0">
-                <a:pos x="connsiteX7" y="connsiteY7"/>
-              </a:cxn>
-              <a:cxn ang="0">
-                <a:pos x="connsiteX8" y="connsiteY8"/>
-              </a:cxn>
-              <a:cxn ang="0">
-                <a:pos x="connsiteX9" y="connsiteY9"/>
-              </a:cxn>
-              <a:cxn ang="0">
-                <a:pos x="connsiteX10" y="connsiteY10"/>
-              </a:cxn>
-              <a:cxn ang="0">
-                <a:pos x="connsiteX11" y="connsiteY11"/>
+                <a:pos x="csX0" y="csY0"/>
+              </a:cxn>
+              <a:cxn ang="0">
+                <a:pos x="csX1" y="csY1"/>
+              </a:cxn>
+              <a:cxn ang="0">
+                <a:pos x="csX2" y="csY2"/>
+              </a:cxn>
+              <a:cxn ang="0">
+                <a:pos x="csX3" y="csY3"/>
+              </a:cxn>
+              <a:cxn ang="0">
+                <a:pos x="csX4" y="csY4"/>
+              </a:cxn>
+              <a:cxn ang="0">
+                <a:pos x="csX5" y="csY5"/>
+              </a:cxn>
+              <a:cxn ang="0">
+                <a:pos x="csX6" y="csY6"/>
+              </a:cxn>
+              <a:cxn ang="0">
+                <a:pos x="csX7" y="csY7"/>
+              </a:cxn>
+              <a:cxn ang="0">
+                <a:pos x="csX8" y="csY8"/>
+              </a:cxn>
+              <a:cxn ang="0">
+                <a:pos x="csX9" y="csY9"/>
+              </a:cxn>
+              <a:cxn ang="0">
+                <a:pos x="csX10" y="csY10"/>
+              </a:cxn>
+              <a:cxn ang="0">
+                <a:pos x="csX11" y="csY11"/>
               </a:cxn>
             </a:cxnLst>
             <a:rect l="l" t="t" r="r" b="b"/>
@@ -22053,68 +22053,68 @@
           <a:custGeom>
             <a:avLst/>
             <a:gdLst>
-              <a:gd name="connsiteX0" fmla="*/ 0 w 3255095"/>
-              <a:gd name="connsiteY0" fmla="*/ 0 h 18288"/>
-              <a:gd name="connsiteX1" fmla="*/ 618468 w 3255095"/>
-              <a:gd name="connsiteY1" fmla="*/ 0 h 18288"/>
-              <a:gd name="connsiteX2" fmla="*/ 1269487 w 3255095"/>
-              <a:gd name="connsiteY2" fmla="*/ 0 h 18288"/>
-              <a:gd name="connsiteX3" fmla="*/ 1953057 w 3255095"/>
-              <a:gd name="connsiteY3" fmla="*/ 0 h 18288"/>
-              <a:gd name="connsiteX4" fmla="*/ 2636627 w 3255095"/>
-              <a:gd name="connsiteY4" fmla="*/ 0 h 18288"/>
-              <a:gd name="connsiteX5" fmla="*/ 3255095 w 3255095"/>
-              <a:gd name="connsiteY5" fmla="*/ 0 h 18288"/>
-              <a:gd name="connsiteX6" fmla="*/ 3255095 w 3255095"/>
-              <a:gd name="connsiteY6" fmla="*/ 18288 h 18288"/>
-              <a:gd name="connsiteX7" fmla="*/ 2538974 w 3255095"/>
-              <a:gd name="connsiteY7" fmla="*/ 18288 h 18288"/>
-              <a:gd name="connsiteX8" fmla="*/ 1822853 w 3255095"/>
-              <a:gd name="connsiteY8" fmla="*/ 18288 h 18288"/>
-              <a:gd name="connsiteX9" fmla="*/ 1171834 w 3255095"/>
-              <a:gd name="connsiteY9" fmla="*/ 18288 h 18288"/>
-              <a:gd name="connsiteX10" fmla="*/ 0 w 3255095"/>
-              <a:gd name="connsiteY10" fmla="*/ 18288 h 18288"/>
-              <a:gd name="connsiteX11" fmla="*/ 0 w 3255095"/>
-              <a:gd name="connsiteY11" fmla="*/ 0 h 18288"/>
+              <a:gd name="csX0" fmla="*/ 0 w 3255095"/>
+              <a:gd name="csY0" fmla="*/ 0 h 18288"/>
+              <a:gd name="csX1" fmla="*/ 618468 w 3255095"/>
+              <a:gd name="csY1" fmla="*/ 0 h 18288"/>
+              <a:gd name="csX2" fmla="*/ 1269487 w 3255095"/>
+              <a:gd name="csY2" fmla="*/ 0 h 18288"/>
+              <a:gd name="csX3" fmla="*/ 1953057 w 3255095"/>
+              <a:gd name="csY3" fmla="*/ 0 h 18288"/>
+              <a:gd name="csX4" fmla="*/ 2636627 w 3255095"/>
+              <a:gd name="csY4" fmla="*/ 0 h 18288"/>
+              <a:gd name="csX5" fmla="*/ 3255095 w 3255095"/>
+              <a:gd name="csY5" fmla="*/ 0 h 18288"/>
+              <a:gd name="csX6" fmla="*/ 3255095 w 3255095"/>
+              <a:gd name="csY6" fmla="*/ 18288 h 18288"/>
+              <a:gd name="csX7" fmla="*/ 2538974 w 3255095"/>
+              <a:gd name="csY7" fmla="*/ 18288 h 18288"/>
+              <a:gd name="csX8" fmla="*/ 1822853 w 3255095"/>
+              <a:gd name="csY8" fmla="*/ 18288 h 18288"/>
+              <a:gd name="csX9" fmla="*/ 1171834 w 3255095"/>
+              <a:gd name="csY9" fmla="*/ 18288 h 18288"/>
+              <a:gd name="csX10" fmla="*/ 0 w 3255095"/>
+              <a:gd name="csY10" fmla="*/ 18288 h 18288"/>
+              <a:gd name="csX11" fmla="*/ 0 w 3255095"/>
+              <a:gd name="csY11" fmla="*/ 0 h 18288"/>
             </a:gdLst>
             <a:ahLst/>
             <a:cxnLst>
               <a:cxn ang="0">
-                <a:pos x="connsiteX0" y="connsiteY0"/>
-              </a:cxn>
-              <a:cxn ang="0">
-                <a:pos x="connsiteX1" y="connsiteY1"/>
-              </a:cxn>
-              <a:cxn ang="0">
-                <a:pos x="connsiteX2" y="connsiteY2"/>
-              </a:cxn>
-              <a:cxn ang="0">
-                <a:pos x="connsiteX3" y="connsiteY3"/>
-              </a:cxn>
-              <a:cxn ang="0">
-                <a:pos x="connsiteX4" y="connsiteY4"/>
-              </a:cxn>
-              <a:cxn ang="0">
-                <a:pos x="connsiteX5" y="connsiteY5"/>
-              </a:cxn>
-              <a:cxn ang="0">
-                <a:pos x="connsiteX6" y="connsiteY6"/>
-              </a:cxn>
-              <a:cxn ang="0">
-                <a:pos x="connsiteX7" y="connsiteY7"/>
-              </a:cxn>
-              <a:cxn ang="0">
-                <a:pos x="connsiteX8" y="connsiteY8"/>
-              </a:cxn>
-              <a:cxn ang="0">
-                <a:pos x="connsiteX9" y="connsiteY9"/>
-              </a:cxn>
-              <a:cxn ang="0">
-                <a:pos x="connsiteX10" y="connsiteY10"/>
-              </a:cxn>
-              <a:cxn ang="0">
-                <a:pos x="connsiteX11" y="connsiteY11"/>
+                <a:pos x="csX0" y="csY0"/>
+              </a:cxn>
+              <a:cxn ang="0">
+                <a:pos x="csX1" y="csY1"/>
+              </a:cxn>
+              <a:cxn ang="0">
+                <a:pos x="csX2" y="csY2"/>
+              </a:cxn>
+              <a:cxn ang="0">
+                <a:pos x="csX3" y="csY3"/>
+              </a:cxn>
+              <a:cxn ang="0">
+                <a:pos x="csX4" y="csY4"/>
+              </a:cxn>
+              <a:cxn ang="0">
+                <a:pos x="csX5" y="csY5"/>
+              </a:cxn>
+              <a:cxn ang="0">
+                <a:pos x="csX6" y="csY6"/>
+              </a:cxn>
+              <a:cxn ang="0">
+                <a:pos x="csX7" y="csY7"/>
+              </a:cxn>
+              <a:cxn ang="0">
+                <a:pos x="csX8" y="csY8"/>
+              </a:cxn>
+              <a:cxn ang="0">
+                <a:pos x="csX9" y="csY9"/>
+              </a:cxn>
+              <a:cxn ang="0">
+                <a:pos x="csX10" y="csY10"/>
+              </a:cxn>
+              <a:cxn ang="0">
+                <a:pos x="csX11" y="csY11"/>
               </a:cxn>
             </a:cxnLst>
             <a:rect l="l" t="t" r="r" b="b"/>
@@ -22811,68 +22811,68 @@
           <a:custGeom>
             <a:avLst/>
             <a:gdLst>
-              <a:gd name="connsiteX0" fmla="*/ 0 w 3255095"/>
-              <a:gd name="connsiteY0" fmla="*/ 0 h 18288"/>
-              <a:gd name="connsiteX1" fmla="*/ 618468 w 3255095"/>
-              <a:gd name="connsiteY1" fmla="*/ 0 h 18288"/>
-              <a:gd name="connsiteX2" fmla="*/ 1269487 w 3255095"/>
-              <a:gd name="connsiteY2" fmla="*/ 0 h 18288"/>
-              <a:gd name="connsiteX3" fmla="*/ 1953057 w 3255095"/>
-              <a:gd name="connsiteY3" fmla="*/ 0 h 18288"/>
-              <a:gd name="connsiteX4" fmla="*/ 2636627 w 3255095"/>
-              <a:gd name="connsiteY4" fmla="*/ 0 h 18288"/>
-              <a:gd name="connsiteX5" fmla="*/ 3255095 w 3255095"/>
-              <a:gd name="connsiteY5" fmla="*/ 0 h 18288"/>
-              <a:gd name="connsiteX6" fmla="*/ 3255095 w 3255095"/>
-              <a:gd name="connsiteY6" fmla="*/ 18288 h 18288"/>
-              <a:gd name="connsiteX7" fmla="*/ 2538974 w 3255095"/>
-              <a:gd name="connsiteY7" fmla="*/ 18288 h 18288"/>
-              <a:gd name="connsiteX8" fmla="*/ 1822853 w 3255095"/>
-              <a:gd name="connsiteY8" fmla="*/ 18288 h 18288"/>
-              <a:gd name="connsiteX9" fmla="*/ 1171834 w 3255095"/>
-              <a:gd name="connsiteY9" fmla="*/ 18288 h 18288"/>
-              <a:gd name="connsiteX10" fmla="*/ 0 w 3255095"/>
-              <a:gd name="connsiteY10" fmla="*/ 18288 h 18288"/>
-              <a:gd name="connsiteX11" fmla="*/ 0 w 3255095"/>
-              <a:gd name="connsiteY11" fmla="*/ 0 h 18288"/>
+              <a:gd name="csX0" fmla="*/ 0 w 3255095"/>
+              <a:gd name="csY0" fmla="*/ 0 h 18288"/>
+              <a:gd name="csX1" fmla="*/ 618468 w 3255095"/>
+              <a:gd name="csY1" fmla="*/ 0 h 18288"/>
+              <a:gd name="csX2" fmla="*/ 1269487 w 3255095"/>
+              <a:gd name="csY2" fmla="*/ 0 h 18288"/>
+              <a:gd name="csX3" fmla="*/ 1953057 w 3255095"/>
+              <a:gd name="csY3" fmla="*/ 0 h 18288"/>
+              <a:gd name="csX4" fmla="*/ 2636627 w 3255095"/>
+              <a:gd name="csY4" fmla="*/ 0 h 18288"/>
+              <a:gd name="csX5" fmla="*/ 3255095 w 3255095"/>
+              <a:gd name="csY5" fmla="*/ 0 h 18288"/>
+              <a:gd name="csX6" fmla="*/ 3255095 w 3255095"/>
+              <a:gd name="csY6" fmla="*/ 18288 h 18288"/>
+              <a:gd name="csX7" fmla="*/ 2538974 w 3255095"/>
+              <a:gd name="csY7" fmla="*/ 18288 h 18288"/>
+              <a:gd name="csX8" fmla="*/ 1822853 w 3255095"/>
+              <a:gd name="csY8" fmla="*/ 18288 h 18288"/>
+              <a:gd name="csX9" fmla="*/ 1171834 w 3255095"/>
+              <a:gd name="csY9" fmla="*/ 18288 h 18288"/>
+              <a:gd name="csX10" fmla="*/ 0 w 3255095"/>
+              <a:gd name="csY10" fmla="*/ 18288 h 18288"/>
+              <a:gd name="csX11" fmla="*/ 0 w 3255095"/>
+              <a:gd name="csY11" fmla="*/ 0 h 18288"/>
             </a:gdLst>
             <a:ahLst/>
             <a:cxnLst>
               <a:cxn ang="0">
-                <a:pos x="connsiteX0" y="connsiteY0"/>
-              </a:cxn>
-              <a:cxn ang="0">
-                <a:pos x="connsiteX1" y="connsiteY1"/>
-              </a:cxn>
-              <a:cxn ang="0">
-                <a:pos x="connsiteX2" y="connsiteY2"/>
-              </a:cxn>
-              <a:cxn ang="0">
-                <a:pos x="connsiteX3" y="connsiteY3"/>
-              </a:cxn>
-              <a:cxn ang="0">
-                <a:pos x="connsiteX4" y="connsiteY4"/>
-              </a:cxn>
-              <a:cxn ang="0">
-                <a:pos x="connsiteX5" y="connsiteY5"/>
-              </a:cxn>
-              <a:cxn ang="0">
-                <a:pos x="connsiteX6" y="connsiteY6"/>
-              </a:cxn>
-              <a:cxn ang="0">
-                <a:pos x="connsiteX7" y="connsiteY7"/>
-              </a:cxn>
-              <a:cxn ang="0">
-                <a:pos x="connsiteX8" y="connsiteY8"/>
-              </a:cxn>
-              <a:cxn ang="0">
-                <a:pos x="connsiteX9" y="connsiteY9"/>
-              </a:cxn>
-              <a:cxn ang="0">
-                <a:pos x="connsiteX10" y="connsiteY10"/>
-              </a:cxn>
-              <a:cxn ang="0">
-                <a:pos x="connsiteX11" y="connsiteY11"/>
+                <a:pos x="csX0" y="csY0"/>
+              </a:cxn>
+              <a:cxn ang="0">
+                <a:pos x="csX1" y="csY1"/>
+              </a:cxn>
+              <a:cxn ang="0">
+                <a:pos x="csX2" y="csY2"/>
+              </a:cxn>
+              <a:cxn ang="0">
+                <a:pos x="csX3" y="csY3"/>
+              </a:cxn>
+              <a:cxn ang="0">
+                <a:pos x="csX4" y="csY4"/>
+              </a:cxn>
+              <a:cxn ang="0">
+                <a:pos x="csX5" y="csY5"/>
+              </a:cxn>
+              <a:cxn ang="0">
+                <a:pos x="csX6" y="csY6"/>
+              </a:cxn>
+              <a:cxn ang="0">
+                <a:pos x="csX7" y="csY7"/>
+              </a:cxn>
+              <a:cxn ang="0">
+                <a:pos x="csX8" y="csY8"/>
+              </a:cxn>
+              <a:cxn ang="0">
+                <a:pos x="csX9" y="csY9"/>
+              </a:cxn>
+              <a:cxn ang="0">
+                <a:pos x="csX10" y="csY10"/>
+              </a:cxn>
+              <a:cxn ang="0">
+                <a:pos x="csX11" y="csY11"/>
               </a:cxn>
             </a:cxnLst>
             <a:rect l="l" t="t" r="r" b="b"/>
